--- a/doc/헬름_IRP세븐서티액티브_발표자료.pptx
+++ b/doc/헬름_IRP세븐서티액티브_발표자료.pptx
@@ -23,6 +23,8 @@
     <p:sldId id="271" r:id="rId22"/>
     <p:sldId id="272" r:id="rId23"/>
     <p:sldId id="273" r:id="rId24"/>
+    <p:sldId id="274" r:id="rId25"/>
+    <p:sldId id="275" r:id="rId26"/>
   </p:sldIdLst>
   <p:sldSz cx="12191695" cy="6858000" type="screen4x3"/>
   <p:notesSz cx="6858000" cy="9144000"/>
@@ -7526,7 +7528,7 @@
                 <a:ea typeface="Malgun Gothic"/>
                 <a:cs typeface="Malgun Gothic"/>
               </a:rPr>
-              <a:t>PHASE 3 · 검증과 재현성</a:t>
+              <a:t>PHASE 3 · 기술 구현</a:t>
             </a:r>
           </a:p>
         </p:txBody>
@@ -7567,7 +7569,7 @@
                 <a:ea typeface="Malgun Gothic"/>
                 <a:cs typeface="Malgun Gothic"/>
               </a:rPr>
-              <a:t>왜 이 숫자를 믿을 수 있나</a:t>
+              <a:t>구현 — 계층 분리와 세 개의 안전장치</a:t>
             </a:r>
           </a:p>
         </p:txBody>
@@ -7616,14 +7618,138 @@
       </p:sp>
       <p:sp>
         <p:nvSpPr>
-          <p:cNvPr id="6" name="Rectangle 5"/>
+          <p:cNvPr id="6" name="TextBox 5"/>
+          <p:cNvSpPr txBox="1"/>
+          <p:nvPr/>
+        </p:nvSpPr>
+        <p:spPr>
+          <a:xfrm>
+            <a:off x="777240" y="1682496"/>
+            <a:ext cx="10637215" cy="329184"/>
+          </a:xfrm>
+          <a:prstGeom prst="rect">
+            <a:avLst/>
+          </a:prstGeom>
+          <a:noFill/>
+        </p:spPr>
+        <p:txBody>
+          <a:bodyPr wrap="square" anchor="t" lIns="0" rIns="0" tIns="0" bIns="0">
+            <a:spAutoFit/>
+          </a:bodyPr>
+          <a:lstStyle/>
+          <a:p>
+            <a:pPr algn="l">
+              <a:lnSpc>
+                <a:spcPct val="125000"/>
+              </a:lnSpc>
+            </a:pPr>
+            <a:r>
+              <a:rPr sz="1800" b="1">
+                <a:solidFill>
+                  <a:srgbClr val="1F3A5F"/>
+                </a:solidFill>
+                <a:latin typeface="Malgun Gothic"/>
+                <a:ea typeface="Malgun Gothic"/>
+                <a:cs typeface="Malgun Gothic"/>
+              </a:rPr>
+              <a:t>재현되지 않는 백테스트는 결과가 아니라 주장이다.</a:t>
+            </a:r>
+          </a:p>
+        </p:txBody>
+      </p:sp>
+      <p:sp>
+        <p:nvSpPr>
+          <p:cNvPr id="7" name="TextBox 6"/>
+          <p:cNvSpPr txBox="1"/>
+          <p:nvPr/>
+        </p:nvSpPr>
+        <p:spPr>
+          <a:xfrm>
+            <a:off x="777240" y="2048256"/>
+            <a:ext cx="10637215" cy="274320"/>
+          </a:xfrm>
+          <a:prstGeom prst="rect">
+            <a:avLst/>
+          </a:prstGeom>
+          <a:noFill/>
+        </p:spPr>
+        <p:txBody>
+          <a:bodyPr wrap="square" anchor="t" lIns="0" rIns="0" tIns="0" bIns="0">
+            <a:spAutoFit/>
+          </a:bodyPr>
+          <a:lstStyle/>
+          <a:p>
+            <a:pPr algn="l">
+              <a:lnSpc>
+                <a:spcPct val="125000"/>
+              </a:lnSpc>
+            </a:pPr>
+            <a:r>
+              <a:rPr sz="1300" b="0">
+                <a:solidFill>
+                  <a:srgbClr val="44505E"/>
+                </a:solidFill>
+                <a:latin typeface="Malgun Gothic"/>
+                <a:ea typeface="Malgun Gothic"/>
+                <a:cs typeface="Malgun Gothic"/>
+              </a:rPr>
+              <a:t>숫자를 만드는 코드보다, 그 숫자가 틀렸을 때 시끄럽게 실패하는 코드에 더 공을 들였다.</a:t>
+            </a:r>
+          </a:p>
+        </p:txBody>
+      </p:sp>
+      <p:sp>
+        <p:nvSpPr>
+          <p:cNvPr id="8" name="Rectangle 7"/>
           <p:cNvSpPr/>
           <p:nvPr/>
         </p:nvSpPr>
         <p:spPr>
           <a:xfrm>
-            <a:off x="777240" y="1737360"/>
-            <a:ext cx="45720" cy="566928"/>
+            <a:off x="777240" y="2487168"/>
+            <a:ext cx="3411626" cy="2103120"/>
+          </a:xfrm>
+          <a:prstGeom prst="rect">
+            <a:avLst/>
+          </a:prstGeom>
+          <a:solidFill>
+            <a:srgbClr val="F5F7FA"/>
+          </a:solidFill>
+          <a:ln>
+            <a:noFill/>
+          </a:ln>
+          <a:effectLst/>
+        </p:spPr>
+        <p:style>
+          <a:lnRef idx="1">
+            <a:schemeClr val="accent1"/>
+          </a:lnRef>
+          <a:fillRef idx="3">
+            <a:schemeClr val="accent1"/>
+          </a:fillRef>
+          <a:effectRef idx="2">
+            <a:schemeClr val="accent1"/>
+          </a:effectRef>
+          <a:fontRef idx="minor">
+            <a:schemeClr val="lt1"/>
+          </a:fontRef>
+        </p:style>
+        <p:txBody>
+          <a:bodyPr rtlCol="0" anchor="ctr"/>
+          <a:lstStyle/>
+          <a:p/>
+        </p:txBody>
+      </p:sp>
+      <p:sp>
+        <p:nvSpPr>
+          <p:cNvPr id="9" name="Rectangle 8"/>
+          <p:cNvSpPr/>
+          <p:nvPr/>
+        </p:nvSpPr>
+        <p:spPr>
+          <a:xfrm>
+            <a:off x="777240" y="2487168"/>
+            <a:ext cx="3411626" cy="45720"/>
           </a:xfrm>
           <a:prstGeom prst="rect">
             <a:avLst/>
@@ -7658,14 +7784,14 @@
       </p:sp>
       <p:sp>
         <p:nvSpPr>
-          <p:cNvPr id="7" name="TextBox 6"/>
+          <p:cNvPr id="10" name="TextBox 9"/>
           <p:cNvSpPr txBox="1"/>
           <p:nvPr/>
         </p:nvSpPr>
         <p:spPr>
           <a:xfrm>
-            <a:off x="996696" y="1682496"/>
-            <a:ext cx="10417759" cy="274320"/>
+            <a:off x="996696" y="2724912"/>
+            <a:ext cx="2972714" cy="457200"/>
           </a:xfrm>
           <a:prstGeom prst="rect">
             <a:avLst/>
@@ -7684,7 +7810,7 @@
               </a:lnSpc>
             </a:pPr>
             <a:r>
-              <a:rPr sz="1550" b="1">
+              <a:rPr sz="1400" b="1">
                 <a:solidFill>
                   <a:srgbClr val="1F3A5F"/>
                 </a:solidFill>
@@ -7692,21 +7818,21 @@
                 <a:ea typeface="Malgun Gothic"/>
                 <a:cs typeface="Malgun Gothic"/>
               </a:rPr>
-              <a:t>채점 기준 사전 고정</a:t>
-            </a:r>
-          </a:p>
-        </p:txBody>
-      </p:sp>
-      <p:sp>
-        <p:nvSpPr>
-          <p:cNvPr id="8" name="TextBox 7"/>
+              <a:t>① 룩어헤드 원천 차단</a:t>
+            </a:r>
+          </a:p>
+        </p:txBody>
+      </p:sp>
+      <p:sp>
+        <p:nvSpPr>
+          <p:cNvPr id="11" name="TextBox 10"/>
           <p:cNvSpPr txBox="1"/>
           <p:nvPr/>
         </p:nvSpPr>
         <p:spPr>
           <a:xfrm>
-            <a:off x="996696" y="1984248"/>
-            <a:ext cx="10417759" cy="502920"/>
+            <a:off x="996696" y="3163824"/>
+            <a:ext cx="2972714" cy="1280160"/>
           </a:xfrm>
           <a:prstGeom prst="rect">
             <a:avLst/>
@@ -7721,11 +7847,11 @@
           <a:p>
             <a:pPr algn="l">
               <a:lnSpc>
-                <a:spcPct val="130000"/>
+                <a:spcPct val="132000"/>
               </a:lnSpc>
             </a:pPr>
             <a:r>
-              <a:rPr sz="1300" b="0">
+              <a:rPr sz="1150" b="0">
                 <a:solidFill>
                   <a:srgbClr val="44505E"/>
                 </a:solidFill>
@@ -7733,21 +7859,63 @@
                 <a:ea typeface="Malgun Gothic"/>
                 <a:cs typeface="Malgun Gothic"/>
               </a:rPr>
-              <a:t>두 구간 Calmar·최악 해·2022 방어를 결과 확인 전에 확정. 미달 실험(진입 경사 단독 MDD −17.6% 등)은 전부 기각·기록.</a:t>
-            </a:r>
-          </a:p>
-        </p:txBody>
-      </p:sp>
-      <p:sp>
-        <p:nvSpPr>
-          <p:cNvPr id="9" name="Rectangle 8"/>
+              <a:t>신호는 봉 i 종가로 확정하고 체결은 i+1 시가로 한다. 전략이 오늘 종가를 보고 오늘 사는 일이 코드 구조상 불가능하다 — 규칙이 아니라 엔진이 막는다.</a:t>
+            </a:r>
+          </a:p>
+        </p:txBody>
+      </p:sp>
+      <p:sp>
+        <p:nvSpPr>
+          <p:cNvPr id="12" name="Rectangle 11"/>
           <p:cNvSpPr/>
           <p:nvPr/>
         </p:nvSpPr>
         <p:spPr>
           <a:xfrm>
-            <a:off x="777240" y="2633472"/>
-            <a:ext cx="45720" cy="566928"/>
+            <a:off x="4390034" y="2487168"/>
+            <a:ext cx="3411626" cy="2103120"/>
+          </a:xfrm>
+          <a:prstGeom prst="rect">
+            <a:avLst/>
+          </a:prstGeom>
+          <a:solidFill>
+            <a:srgbClr val="F5F7FA"/>
+          </a:solidFill>
+          <a:ln>
+            <a:noFill/>
+          </a:ln>
+          <a:effectLst/>
+        </p:spPr>
+        <p:style>
+          <a:lnRef idx="1">
+            <a:schemeClr val="accent1"/>
+          </a:lnRef>
+          <a:fillRef idx="3">
+            <a:schemeClr val="accent1"/>
+          </a:fillRef>
+          <a:effectRef idx="2">
+            <a:schemeClr val="accent1"/>
+          </a:effectRef>
+          <a:fontRef idx="minor">
+            <a:schemeClr val="lt1"/>
+          </a:fontRef>
+        </p:style>
+        <p:txBody>
+          <a:bodyPr rtlCol="0" anchor="ctr"/>
+          <a:lstStyle/>
+          <a:p/>
+        </p:txBody>
+      </p:sp>
+      <p:sp>
+        <p:nvSpPr>
+          <p:cNvPr id="13" name="Rectangle 12"/>
+          <p:cNvSpPr/>
+          <p:nvPr/>
+        </p:nvSpPr>
+        <p:spPr>
+          <a:xfrm>
+            <a:off x="4390034" y="2487168"/>
+            <a:ext cx="3411626" cy="45720"/>
           </a:xfrm>
           <a:prstGeom prst="rect">
             <a:avLst/>
@@ -7782,14 +7950,14 @@
       </p:sp>
       <p:sp>
         <p:nvSpPr>
-          <p:cNvPr id="10" name="TextBox 9"/>
+          <p:cNvPr id="14" name="TextBox 13"/>
           <p:cNvSpPr txBox="1"/>
           <p:nvPr/>
         </p:nvSpPr>
         <p:spPr>
           <a:xfrm>
-            <a:off x="996696" y="2578608"/>
-            <a:ext cx="10417759" cy="274320"/>
+            <a:off x="4609490" y="2724912"/>
+            <a:ext cx="2972714" cy="457200"/>
           </a:xfrm>
           <a:prstGeom prst="rect">
             <a:avLst/>
@@ -7808,7 +7976,7 @@
               </a:lnSpc>
             </a:pPr>
             <a:r>
-              <a:rPr sz="1550" b="1">
+              <a:rPr sz="1400" b="1">
                 <a:solidFill>
                   <a:srgbClr val="1F3A5F"/>
                 </a:solidFill>
@@ -7816,21 +7984,21 @@
                 <a:ea typeface="Malgun Gothic"/>
                 <a:cs typeface="Malgun Gothic"/>
               </a:rPr>
-              <a:t>9/9 plateau</a:t>
-            </a:r>
-          </a:p>
-        </p:txBody>
-      </p:sp>
-      <p:sp>
-        <p:nvSpPr>
-          <p:cNvPr id="11" name="TextBox 10"/>
+              <a:t>② 무결성 fail-loud</a:t>
+            </a:r>
+          </a:p>
+        </p:txBody>
+      </p:sp>
+      <p:sp>
+        <p:nvSpPr>
+          <p:cNvPr id="15" name="TextBox 14"/>
           <p:cNvSpPr txBox="1"/>
           <p:nvPr/>
         </p:nvSpPr>
         <p:spPr>
           <a:xfrm>
-            <a:off x="996696" y="2880360"/>
-            <a:ext cx="10417759" cy="502920"/>
+            <a:off x="4609490" y="3163824"/>
+            <a:ext cx="2972714" cy="1280160"/>
           </a:xfrm>
           <a:prstGeom prst="rect">
             <a:avLst/>
@@ -7845,11 +8013,11 @@
           <a:p>
             <a:pPr algn="l">
               <a:lnSpc>
-                <a:spcPct val="130000"/>
+                <a:spcPct val="132000"/>
               </a:lnSpc>
             </a:pPr>
             <a:r>
-              <a:rPr sz="1300" b="0">
+              <a:rPr sz="1150" b="0">
                 <a:solidFill>
                   <a:srgbClr val="44505E"/>
                 </a:solidFill>
@@ -7857,21 +8025,63 @@
                 <a:ea typeface="Malgun Gothic"/>
                 <a:cs typeface="Malgun Gothic"/>
               </a:rPr>
-              <a:t>채택값 주변 9개 설정을 전수 측정, 전부 기준선 초과 — 한 점의 운이 아니라 면 전체가 들렸다.</a:t>
-            </a:r>
-          </a:p>
-        </p:txBody>
-      </p:sp>
-      <p:sp>
-        <p:nvSpPr>
-          <p:cNvPr id="12" name="Rectangle 11"/>
+              <a:t>실제 사고에서 나온 장치다. 금(411060) 데이터가 없는 환경에서 돌리면 경고 한 줄만 남고 금이 빠진 채 그럴듯한 수치가 나왔다. 이제 실행 전 전 종목 로드를 검증하고 하나라도 실패하면 멈춘다.</a:t>
+            </a:r>
+          </a:p>
+        </p:txBody>
+      </p:sp>
+      <p:sp>
+        <p:nvSpPr>
+          <p:cNvPr id="16" name="Rectangle 15"/>
           <p:cNvSpPr/>
           <p:nvPr/>
         </p:nvSpPr>
         <p:spPr>
           <a:xfrm>
-            <a:off x="777240" y="3529584"/>
-            <a:ext cx="45720" cy="566928"/>
+            <a:off x="8002828" y="2487168"/>
+            <a:ext cx="3411626" cy="2103120"/>
+          </a:xfrm>
+          <a:prstGeom prst="rect">
+            <a:avLst/>
+          </a:prstGeom>
+          <a:solidFill>
+            <a:srgbClr val="F5F7FA"/>
+          </a:solidFill>
+          <a:ln>
+            <a:noFill/>
+          </a:ln>
+          <a:effectLst/>
+        </p:spPr>
+        <p:style>
+          <a:lnRef idx="1">
+            <a:schemeClr val="accent1"/>
+          </a:lnRef>
+          <a:fillRef idx="3">
+            <a:schemeClr val="accent1"/>
+          </a:fillRef>
+          <a:effectRef idx="2">
+            <a:schemeClr val="accent1"/>
+          </a:effectRef>
+          <a:fontRef idx="minor">
+            <a:schemeClr val="lt1"/>
+          </a:fontRef>
+        </p:style>
+        <p:txBody>
+          <a:bodyPr rtlCol="0" anchor="ctr"/>
+          <a:lstStyle/>
+          <a:p/>
+        </p:txBody>
+      </p:sp>
+      <p:sp>
+        <p:nvSpPr>
+          <p:cNvPr id="17" name="Rectangle 16"/>
+          <p:cNvSpPr/>
+          <p:nvPr/>
+        </p:nvSpPr>
+        <p:spPr>
+          <a:xfrm>
+            <a:off x="8002828" y="2487168"/>
+            <a:ext cx="3411626" cy="45720"/>
           </a:xfrm>
           <a:prstGeom prst="rect">
             <a:avLst/>
@@ -7906,14 +8116,14 @@
       </p:sp>
       <p:sp>
         <p:nvSpPr>
-          <p:cNvPr id="13" name="TextBox 12"/>
+          <p:cNvPr id="18" name="TextBox 17"/>
           <p:cNvSpPr txBox="1"/>
           <p:nvPr/>
         </p:nvSpPr>
         <p:spPr>
           <a:xfrm>
-            <a:off x="996696" y="3474720"/>
-            <a:ext cx="10417759" cy="274320"/>
+            <a:off x="8222284" y="2724912"/>
+            <a:ext cx="2972714" cy="457200"/>
           </a:xfrm>
           <a:prstGeom prst="rect">
             <a:avLst/>
@@ -7932,7 +8142,7 @@
               </a:lnSpc>
             </a:pPr>
             <a:r>
-              <a:rPr sz="1550" b="1">
+              <a:rPr sz="1400" b="1">
                 <a:solidFill>
                   <a:srgbClr val="1F3A5F"/>
                 </a:solidFill>
@@ -7940,21 +8150,21 @@
                 <a:ea typeface="Malgun Gothic"/>
                 <a:cs typeface="Malgun Gothic"/>
               </a:rPr>
-              <a:t>두 구간 교차 검증</a:t>
-            </a:r>
-          </a:p>
-        </p:txBody>
-      </p:sp>
-      <p:sp>
-        <p:nvSpPr>
-          <p:cNvPr id="14" name="TextBox 13"/>
+              <a:t>③ 관측 프로브 무해성</a:t>
+            </a:r>
+          </a:p>
+        </p:txBody>
+      </p:sp>
+      <p:sp>
+        <p:nvSpPr>
+          <p:cNvPr id="19" name="TextBox 18"/>
           <p:cNvSpPr txBox="1"/>
           <p:nvPr/>
         </p:nvSpPr>
         <p:spPr>
           <a:xfrm>
-            <a:off x="996696" y="3776472"/>
-            <a:ext cx="10417759" cy="502920"/>
+            <a:off x="8222284" y="3163824"/>
+            <a:ext cx="2972714" cy="1280160"/>
           </a:xfrm>
           <a:prstGeom prst="rect">
             <a:avLst/>
@@ -7969,11 +8179,11 @@
           <a:p>
             <a:pPr algn="l">
               <a:lnSpc>
-                <a:spcPct val="130000"/>
+                <a:spcPct val="132000"/>
               </a:lnSpc>
             </a:pPr>
             <a:r>
-              <a:rPr sz="1300" b="0">
+              <a:rPr sz="1150" b="0">
                 <a:solidFill>
                   <a:srgbClr val="44505E"/>
                 </a:solidFill>
@@ -7981,27 +8191,27 @@
                 <a:ea typeface="Malgun Gothic"/>
                 <a:cs typeface="Malgun Gothic"/>
               </a:rPr>
-              <a:t>2026년이라는 한 해를 통째로 빼도 Calmar 1.09로 유지·상승한다(전 구간 1.07). 같은 구간 벤치마크는 0.56 — 특정 국면에 기댄 성과가 아니다.</a:t>
-            </a:r>
-          </a:p>
-        </p:txBody>
-      </p:sp>
-      <p:sp>
-        <p:nvSpPr>
-          <p:cNvPr id="15" name="Rectangle 14"/>
+              <a:t>노출·보유 구성을 재려고 판정 로직을 다시 구현하면 엔진과 어긋난다. 프로브는 엔진이 이미 정한 값을 받아적기만 하며, 프로브를 끼운 자산곡선이 끼우지 않은 것과 완전히 일치함을 매 실행 검증한다.</a:t>
+            </a:r>
+          </a:p>
+        </p:txBody>
+      </p:sp>
+      <p:sp>
+        <p:nvSpPr>
+          <p:cNvPr id="20" name="Rectangle 19"/>
           <p:cNvSpPr/>
           <p:nvPr/>
         </p:nvSpPr>
         <p:spPr>
           <a:xfrm>
-            <a:off x="777240" y="4425696"/>
-            <a:ext cx="45720" cy="566928"/>
+            <a:off x="777240" y="4882896"/>
+            <a:ext cx="10637215" cy="969264"/>
           </a:xfrm>
           <a:prstGeom prst="rect">
             <a:avLst/>
           </a:prstGeom>
           <a:solidFill>
-            <a:srgbClr val="C8A24B"/>
+            <a:srgbClr val="1F3A5F"/>
           </a:solidFill>
           <a:ln>
             <a:noFill/>
@@ -8030,14 +8240,14 @@
       </p:sp>
       <p:sp>
         <p:nvSpPr>
-          <p:cNvPr id="16" name="TextBox 15"/>
+          <p:cNvPr id="21" name="TextBox 20"/>
           <p:cNvSpPr txBox="1"/>
           <p:nvPr/>
         </p:nvSpPr>
         <p:spPr>
           <a:xfrm>
-            <a:off x="996696" y="4370832"/>
-            <a:ext cx="10417759" cy="274320"/>
+            <a:off x="1033272" y="5029200"/>
+            <a:ext cx="10125151" cy="256032"/>
           </a:xfrm>
           <a:prstGeom prst="rect">
             <a:avLst/>
@@ -8056,29 +8266,29 @@
               </a:lnSpc>
             </a:pPr>
             <a:r>
-              <a:rPr sz="1550" b="1">
-                <a:solidFill>
-                  <a:srgbClr val="1F3A5F"/>
+              <a:rPr sz="1200" b="1">
+                <a:solidFill>
+                  <a:srgbClr val="C8A24B"/>
                 </a:solidFill>
                 <a:latin typeface="Malgun Gothic"/>
                 <a:ea typeface="Malgun Gothic"/>
                 <a:cs typeface="Malgun Gothic"/>
               </a:rPr>
-              <a:t>개선 전수 탐색 후 확정</a:t>
-            </a:r>
-          </a:p>
-        </p:txBody>
-      </p:sp>
-      <p:sp>
-        <p:nvSpPr>
-          <p:cNvPr id="17" name="TextBox 16"/>
+              <a:t>아키텍처 · 스택</a:t>
+            </a:r>
+          </a:p>
+        </p:txBody>
+      </p:sp>
+      <p:sp>
+        <p:nvSpPr>
+          <p:cNvPr id="22" name="TextBox 21"/>
           <p:cNvSpPr txBox="1"/>
           <p:nvPr/>
         </p:nvSpPr>
         <p:spPr>
           <a:xfrm>
-            <a:off x="996696" y="4672584"/>
-            <a:ext cx="10417759" cy="502920"/>
+            <a:off x="1033272" y="5303520"/>
+            <a:ext cx="10125151" cy="457200"/>
           </a:xfrm>
           <a:prstGeom prst="rect">
             <a:avLst/>
@@ -8093,143 +8303,20 @@
           <a:p>
             <a:pPr algn="l">
               <a:lnSpc>
-                <a:spcPct val="130000"/>
+                <a:spcPct val="135000"/>
               </a:lnSpc>
             </a:pPr>
             <a:r>
-              <a:rPr sz="1300" b="0">
-                <a:solidFill>
-                  <a:srgbClr val="44505E"/>
+              <a:rPr sz="1100" b="0">
+                <a:solidFill>
+                  <a:srgbClr val="D3DCE8"/>
                 </a:solidFill>
                 <a:latin typeface="Malgun Gothic"/>
                 <a:ea typeface="Malgun Gothic"/>
                 <a:cs typeface="Malgun Gothic"/>
               </a:rPr>
-              <a:t>동결 이후 대안 8계열·11개 구성을 같은 기준으로 전수 측정 — 채택 0. "대안을 못 찾아서"가 아니라 "주변 전부를 재본 뒤" 확정된 구성이다.</a:t>
-            </a:r>
-          </a:p>
-        </p:txBody>
-      </p:sp>
-      <p:sp>
-        <p:nvSpPr>
-          <p:cNvPr id="18" name="Rectangle 17"/>
-          <p:cNvSpPr/>
-          <p:nvPr/>
-        </p:nvSpPr>
-        <p:spPr>
-          <a:xfrm>
-            <a:off x="777240" y="5321808"/>
-            <a:ext cx="45720" cy="566928"/>
-          </a:xfrm>
-          <a:prstGeom prst="rect">
-            <a:avLst/>
-          </a:prstGeom>
-          <a:solidFill>
-            <a:srgbClr val="C8A24B"/>
-          </a:solidFill>
-          <a:ln>
-            <a:noFill/>
-          </a:ln>
-          <a:effectLst/>
-        </p:spPr>
-        <p:style>
-          <a:lnRef idx="1">
-            <a:schemeClr val="accent1"/>
-          </a:lnRef>
-          <a:fillRef idx="3">
-            <a:schemeClr val="accent1"/>
-          </a:fillRef>
-          <a:effectRef idx="2">
-            <a:schemeClr val="accent1"/>
-          </a:effectRef>
-          <a:fontRef idx="minor">
-            <a:schemeClr val="lt1"/>
-          </a:fontRef>
-        </p:style>
-        <p:txBody>
-          <a:bodyPr rtlCol="0" anchor="ctr"/>
-          <a:lstStyle/>
-          <a:p/>
-        </p:txBody>
-      </p:sp>
-      <p:sp>
-        <p:nvSpPr>
-          <p:cNvPr id="19" name="TextBox 18"/>
-          <p:cNvSpPr txBox="1"/>
-          <p:nvPr/>
-        </p:nvSpPr>
-        <p:spPr>
-          <a:xfrm>
-            <a:off x="996696" y="5266944"/>
-            <a:ext cx="10417759" cy="274320"/>
-          </a:xfrm>
-          <a:prstGeom prst="rect">
-            <a:avLst/>
-          </a:prstGeom>
-          <a:noFill/>
-        </p:spPr>
-        <p:txBody>
-          <a:bodyPr wrap="square" anchor="t" lIns="0" rIns="0" tIns="0" bIns="0">
-            <a:spAutoFit/>
-          </a:bodyPr>
-          <a:lstStyle/>
-          <a:p>
-            <a:pPr algn="l">
-              <a:lnSpc>
-                <a:spcPct val="125000"/>
-              </a:lnSpc>
-            </a:pPr>
-            <a:r>
-              <a:rPr sz="1550" b="1">
-                <a:solidFill>
-                  <a:srgbClr val="1F3A5F"/>
-                </a:solidFill>
-                <a:latin typeface="Malgun Gothic"/>
-                <a:ea typeface="Malgun Gothic"/>
-                <a:cs typeface="Malgun Gothic"/>
-              </a:rPr>
-              <a:t>재현성</a:t>
-            </a:r>
-          </a:p>
-        </p:txBody>
-      </p:sp>
-      <p:sp>
-        <p:nvSpPr>
-          <p:cNvPr id="20" name="TextBox 19"/>
-          <p:cNvSpPr txBox="1"/>
-          <p:nvPr/>
-        </p:nvSpPr>
-        <p:spPr>
-          <a:xfrm>
-            <a:off x="996696" y="5568696"/>
-            <a:ext cx="10417759" cy="502920"/>
-          </a:xfrm>
-          <a:prstGeom prst="rect">
-            <a:avLst/>
-          </a:prstGeom>
-          <a:noFill/>
-        </p:spPr>
-        <p:txBody>
-          <a:bodyPr wrap="square" anchor="t" lIns="0" rIns="0" tIns="0" bIns="0">
-            <a:spAutoFit/>
-          </a:bodyPr>
-          <a:lstStyle/>
-          <a:p>
-            <a:pPr algn="l">
-              <a:lnSpc>
-                <a:spcPct val="130000"/>
-              </a:lnSpc>
-            </a:pPr>
-            <a:r>
-              <a:rPr sz="1300" b="0">
-                <a:solidFill>
-                  <a:srgbClr val="44505E"/>
-                </a:solidFill>
-                <a:latin typeface="Malgun Gothic"/>
-                <a:ea typeface="Malgun Gothic"/>
-                <a:cs typeface="Malgun Gothic"/>
-              </a:rPr>
-              <a:t>동일 커밋·동일 데이터에서 자산곡선이 그대로 재현된다. 기능 플래그 대조 실험으로 각 규칙의 기여를 개별 검증했고, 검증 32항목과 자가 발견 결함 전수를 문서로 공개한다.</a:t>
+              <a:t>책임 하나 = 클래스 하나 = 파일 하나 · 계층 9개(data · indicator · strategy · backtest · satellite · irp · portfolio · analysis · report) · 파이썬 67파일 8,123줄
+추상 기반 클래스로 인터페이스 고정 + 의존성 주입 → 지표·전략 교체가 설정 변경으로 끝난다  ·  pandas · numpy · pyarrow(Parquet) · matplotlib</a:t>
             </a:r>
           </a:p>
         </p:txBody>
@@ -8243,6 +8330,810 @@
 </file>
 
 <file path=ppt/slides/slide15.xml><?xml version="1.0" encoding="utf-8"?>
+<p:sld xmlns:a="http://schemas.openxmlformats.org/drawingml/2006/main" xmlns:p="http://schemas.openxmlformats.org/presentationml/2006/main" xmlns:r="http://schemas.openxmlformats.org/officeDocument/2006/relationships">
+  <p:cSld>
+    <p:spTree>
+      <p:nvGrpSpPr>
+        <p:cNvPr id="1" name=""/>
+        <p:cNvGrpSpPr/>
+        <p:nvPr/>
+      </p:nvGrpSpPr>
+      <p:grpSpPr/>
+      <p:sp>
+        <p:nvSpPr>
+          <p:cNvPr id="2" name="Rectangle 1"/>
+          <p:cNvSpPr/>
+          <p:nvPr/>
+        </p:nvSpPr>
+        <p:spPr>
+          <a:xfrm>
+            <a:off x="0" y="0"/>
+            <a:ext cx="12191695" cy="6858000"/>
+          </a:xfrm>
+          <a:prstGeom prst="rect">
+            <a:avLst/>
+          </a:prstGeom>
+          <a:solidFill>
+            <a:srgbClr val="FFFFFF"/>
+          </a:solidFill>
+          <a:ln>
+            <a:noFill/>
+          </a:ln>
+          <a:effectLst/>
+        </p:spPr>
+        <p:style>
+          <a:lnRef idx="1">
+            <a:schemeClr val="accent1"/>
+          </a:lnRef>
+          <a:fillRef idx="3">
+            <a:schemeClr val="accent1"/>
+          </a:fillRef>
+          <a:effectRef idx="2">
+            <a:schemeClr val="accent1"/>
+          </a:effectRef>
+          <a:fontRef idx="minor">
+            <a:schemeClr val="lt1"/>
+          </a:fontRef>
+        </p:style>
+        <p:txBody>
+          <a:bodyPr rtlCol="0" anchor="ctr"/>
+          <a:lstStyle/>
+          <a:p/>
+        </p:txBody>
+      </p:sp>
+      <p:sp>
+        <p:nvSpPr>
+          <p:cNvPr id="3" name="TextBox 2"/>
+          <p:cNvSpPr txBox="1"/>
+          <p:nvPr/>
+        </p:nvSpPr>
+        <p:spPr>
+          <a:xfrm>
+            <a:off x="777240" y="475488"/>
+            <a:ext cx="10637215" cy="256032"/>
+          </a:xfrm>
+          <a:prstGeom prst="rect">
+            <a:avLst/>
+          </a:prstGeom>
+          <a:noFill/>
+        </p:spPr>
+        <p:txBody>
+          <a:bodyPr wrap="square" anchor="t" lIns="0" rIns="0" tIns="0" bIns="0">
+            <a:spAutoFit/>
+          </a:bodyPr>
+          <a:lstStyle/>
+          <a:p>
+            <a:pPr algn="l">
+              <a:lnSpc>
+                <a:spcPct val="125000"/>
+              </a:lnSpc>
+            </a:pPr>
+            <a:r>
+              <a:rPr sz="1200" b="1">
+                <a:solidFill>
+                  <a:srgbClr val="C8A24B"/>
+                </a:solidFill>
+                <a:latin typeface="Malgun Gothic"/>
+                <a:ea typeface="Malgun Gothic"/>
+                <a:cs typeface="Malgun Gothic"/>
+              </a:rPr>
+              <a:t>PHASE 3 · 검증과 재현성</a:t>
+            </a:r>
+          </a:p>
+        </p:txBody>
+      </p:sp>
+      <p:sp>
+        <p:nvSpPr>
+          <p:cNvPr id="4" name="TextBox 3"/>
+          <p:cNvSpPr txBox="1"/>
+          <p:nvPr/>
+        </p:nvSpPr>
+        <p:spPr>
+          <a:xfrm>
+            <a:off x="777240" y="786384"/>
+            <a:ext cx="10637215" cy="548640"/>
+          </a:xfrm>
+          <a:prstGeom prst="rect">
+            <a:avLst/>
+          </a:prstGeom>
+          <a:noFill/>
+        </p:spPr>
+        <p:txBody>
+          <a:bodyPr wrap="square" anchor="t" lIns="0" rIns="0" tIns="0" bIns="0">
+            <a:spAutoFit/>
+          </a:bodyPr>
+          <a:lstStyle/>
+          <a:p>
+            <a:pPr algn="l">
+              <a:lnSpc>
+                <a:spcPct val="125000"/>
+              </a:lnSpc>
+            </a:pPr>
+            <a:r>
+              <a:rPr sz="2700" b="1">
+                <a:solidFill>
+                  <a:srgbClr val="1F3A5F"/>
+                </a:solidFill>
+                <a:latin typeface="Malgun Gothic"/>
+                <a:ea typeface="Malgun Gothic"/>
+                <a:cs typeface="Malgun Gothic"/>
+              </a:rPr>
+              <a:t>왜 이 숫자를 믿을 수 있나</a:t>
+            </a:r>
+          </a:p>
+        </p:txBody>
+      </p:sp>
+      <p:sp>
+        <p:nvSpPr>
+          <p:cNvPr id="5" name="Rectangle 4"/>
+          <p:cNvSpPr/>
+          <p:nvPr/>
+        </p:nvSpPr>
+        <p:spPr>
+          <a:xfrm>
+            <a:off x="777240" y="1444752"/>
+            <a:ext cx="10637215" cy="9525"/>
+          </a:xfrm>
+          <a:prstGeom prst="rect">
+            <a:avLst/>
+          </a:prstGeom>
+          <a:solidFill>
+            <a:srgbClr val="D8DEE6"/>
+          </a:solidFill>
+          <a:ln>
+            <a:noFill/>
+          </a:ln>
+          <a:effectLst/>
+        </p:spPr>
+        <p:style>
+          <a:lnRef idx="1">
+            <a:schemeClr val="accent1"/>
+          </a:lnRef>
+          <a:fillRef idx="3">
+            <a:schemeClr val="accent1"/>
+          </a:fillRef>
+          <a:effectRef idx="2">
+            <a:schemeClr val="accent1"/>
+          </a:effectRef>
+          <a:fontRef idx="minor">
+            <a:schemeClr val="lt1"/>
+          </a:fontRef>
+        </p:style>
+        <p:txBody>
+          <a:bodyPr rtlCol="0" anchor="ctr"/>
+          <a:lstStyle/>
+          <a:p/>
+        </p:txBody>
+      </p:sp>
+      <p:sp>
+        <p:nvSpPr>
+          <p:cNvPr id="6" name="Rectangle 5"/>
+          <p:cNvSpPr/>
+          <p:nvPr/>
+        </p:nvSpPr>
+        <p:spPr>
+          <a:xfrm>
+            <a:off x="777240" y="1737360"/>
+            <a:ext cx="45720" cy="566928"/>
+          </a:xfrm>
+          <a:prstGeom prst="rect">
+            <a:avLst/>
+          </a:prstGeom>
+          <a:solidFill>
+            <a:srgbClr val="C8A24B"/>
+          </a:solidFill>
+          <a:ln>
+            <a:noFill/>
+          </a:ln>
+          <a:effectLst/>
+        </p:spPr>
+        <p:style>
+          <a:lnRef idx="1">
+            <a:schemeClr val="accent1"/>
+          </a:lnRef>
+          <a:fillRef idx="3">
+            <a:schemeClr val="accent1"/>
+          </a:fillRef>
+          <a:effectRef idx="2">
+            <a:schemeClr val="accent1"/>
+          </a:effectRef>
+          <a:fontRef idx="minor">
+            <a:schemeClr val="lt1"/>
+          </a:fontRef>
+        </p:style>
+        <p:txBody>
+          <a:bodyPr rtlCol="0" anchor="ctr"/>
+          <a:lstStyle/>
+          <a:p/>
+        </p:txBody>
+      </p:sp>
+      <p:sp>
+        <p:nvSpPr>
+          <p:cNvPr id="7" name="TextBox 6"/>
+          <p:cNvSpPr txBox="1"/>
+          <p:nvPr/>
+        </p:nvSpPr>
+        <p:spPr>
+          <a:xfrm>
+            <a:off x="996696" y="1682496"/>
+            <a:ext cx="10417759" cy="274320"/>
+          </a:xfrm>
+          <a:prstGeom prst="rect">
+            <a:avLst/>
+          </a:prstGeom>
+          <a:noFill/>
+        </p:spPr>
+        <p:txBody>
+          <a:bodyPr wrap="square" anchor="t" lIns="0" rIns="0" tIns="0" bIns="0">
+            <a:spAutoFit/>
+          </a:bodyPr>
+          <a:lstStyle/>
+          <a:p>
+            <a:pPr algn="l">
+              <a:lnSpc>
+                <a:spcPct val="125000"/>
+              </a:lnSpc>
+            </a:pPr>
+            <a:r>
+              <a:rPr sz="1550" b="1">
+                <a:solidFill>
+                  <a:srgbClr val="1F3A5F"/>
+                </a:solidFill>
+                <a:latin typeface="Malgun Gothic"/>
+                <a:ea typeface="Malgun Gothic"/>
+                <a:cs typeface="Malgun Gothic"/>
+              </a:rPr>
+              <a:t>채점 기준 사전 고정</a:t>
+            </a:r>
+          </a:p>
+        </p:txBody>
+      </p:sp>
+      <p:sp>
+        <p:nvSpPr>
+          <p:cNvPr id="8" name="TextBox 7"/>
+          <p:cNvSpPr txBox="1"/>
+          <p:nvPr/>
+        </p:nvSpPr>
+        <p:spPr>
+          <a:xfrm>
+            <a:off x="996696" y="1984248"/>
+            <a:ext cx="10417759" cy="502920"/>
+          </a:xfrm>
+          <a:prstGeom prst="rect">
+            <a:avLst/>
+          </a:prstGeom>
+          <a:noFill/>
+        </p:spPr>
+        <p:txBody>
+          <a:bodyPr wrap="square" anchor="t" lIns="0" rIns="0" tIns="0" bIns="0">
+            <a:spAutoFit/>
+          </a:bodyPr>
+          <a:lstStyle/>
+          <a:p>
+            <a:pPr algn="l">
+              <a:lnSpc>
+                <a:spcPct val="130000"/>
+              </a:lnSpc>
+            </a:pPr>
+            <a:r>
+              <a:rPr sz="1300" b="0">
+                <a:solidFill>
+                  <a:srgbClr val="44505E"/>
+                </a:solidFill>
+                <a:latin typeface="Malgun Gothic"/>
+                <a:ea typeface="Malgun Gothic"/>
+                <a:cs typeface="Malgun Gothic"/>
+              </a:rPr>
+              <a:t>두 구간 Calmar·최악 해·2022 방어를 결과 확인 전에 확정. 미달 실험(진입 경사 단독 MDD −17.6% 등)은 전부 기각·기록.</a:t>
+            </a:r>
+          </a:p>
+        </p:txBody>
+      </p:sp>
+      <p:sp>
+        <p:nvSpPr>
+          <p:cNvPr id="9" name="Rectangle 8"/>
+          <p:cNvSpPr/>
+          <p:nvPr/>
+        </p:nvSpPr>
+        <p:spPr>
+          <a:xfrm>
+            <a:off x="777240" y="2633472"/>
+            <a:ext cx="45720" cy="566928"/>
+          </a:xfrm>
+          <a:prstGeom prst="rect">
+            <a:avLst/>
+          </a:prstGeom>
+          <a:solidFill>
+            <a:srgbClr val="C8A24B"/>
+          </a:solidFill>
+          <a:ln>
+            <a:noFill/>
+          </a:ln>
+          <a:effectLst/>
+        </p:spPr>
+        <p:style>
+          <a:lnRef idx="1">
+            <a:schemeClr val="accent1"/>
+          </a:lnRef>
+          <a:fillRef idx="3">
+            <a:schemeClr val="accent1"/>
+          </a:fillRef>
+          <a:effectRef idx="2">
+            <a:schemeClr val="accent1"/>
+          </a:effectRef>
+          <a:fontRef idx="minor">
+            <a:schemeClr val="lt1"/>
+          </a:fontRef>
+        </p:style>
+        <p:txBody>
+          <a:bodyPr rtlCol="0" anchor="ctr"/>
+          <a:lstStyle/>
+          <a:p/>
+        </p:txBody>
+      </p:sp>
+      <p:sp>
+        <p:nvSpPr>
+          <p:cNvPr id="10" name="TextBox 9"/>
+          <p:cNvSpPr txBox="1"/>
+          <p:nvPr/>
+        </p:nvSpPr>
+        <p:spPr>
+          <a:xfrm>
+            <a:off x="996696" y="2578608"/>
+            <a:ext cx="10417759" cy="274320"/>
+          </a:xfrm>
+          <a:prstGeom prst="rect">
+            <a:avLst/>
+          </a:prstGeom>
+          <a:noFill/>
+        </p:spPr>
+        <p:txBody>
+          <a:bodyPr wrap="square" anchor="t" lIns="0" rIns="0" tIns="0" bIns="0">
+            <a:spAutoFit/>
+          </a:bodyPr>
+          <a:lstStyle/>
+          <a:p>
+            <a:pPr algn="l">
+              <a:lnSpc>
+                <a:spcPct val="125000"/>
+              </a:lnSpc>
+            </a:pPr>
+            <a:r>
+              <a:rPr sz="1550" b="1">
+                <a:solidFill>
+                  <a:srgbClr val="1F3A5F"/>
+                </a:solidFill>
+                <a:latin typeface="Malgun Gothic"/>
+                <a:ea typeface="Malgun Gothic"/>
+                <a:cs typeface="Malgun Gothic"/>
+              </a:rPr>
+              <a:t>9/9 plateau</a:t>
+            </a:r>
+          </a:p>
+        </p:txBody>
+      </p:sp>
+      <p:sp>
+        <p:nvSpPr>
+          <p:cNvPr id="11" name="TextBox 10"/>
+          <p:cNvSpPr txBox="1"/>
+          <p:nvPr/>
+        </p:nvSpPr>
+        <p:spPr>
+          <a:xfrm>
+            <a:off x="996696" y="2880360"/>
+            <a:ext cx="10417759" cy="502920"/>
+          </a:xfrm>
+          <a:prstGeom prst="rect">
+            <a:avLst/>
+          </a:prstGeom>
+          <a:noFill/>
+        </p:spPr>
+        <p:txBody>
+          <a:bodyPr wrap="square" anchor="t" lIns="0" rIns="0" tIns="0" bIns="0">
+            <a:spAutoFit/>
+          </a:bodyPr>
+          <a:lstStyle/>
+          <a:p>
+            <a:pPr algn="l">
+              <a:lnSpc>
+                <a:spcPct val="130000"/>
+              </a:lnSpc>
+            </a:pPr>
+            <a:r>
+              <a:rPr sz="1300" b="0">
+                <a:solidFill>
+                  <a:srgbClr val="44505E"/>
+                </a:solidFill>
+                <a:latin typeface="Malgun Gothic"/>
+                <a:ea typeface="Malgun Gothic"/>
+                <a:cs typeface="Malgun Gothic"/>
+              </a:rPr>
+              <a:t>채택값 주변 9개 설정을 전수 측정, 전부 기준선 초과 — 한 점의 운이 아니라 면 전체가 들렸다.</a:t>
+            </a:r>
+          </a:p>
+        </p:txBody>
+      </p:sp>
+      <p:sp>
+        <p:nvSpPr>
+          <p:cNvPr id="12" name="Rectangle 11"/>
+          <p:cNvSpPr/>
+          <p:nvPr/>
+        </p:nvSpPr>
+        <p:spPr>
+          <a:xfrm>
+            <a:off x="777240" y="3529584"/>
+            <a:ext cx="45720" cy="566928"/>
+          </a:xfrm>
+          <a:prstGeom prst="rect">
+            <a:avLst/>
+          </a:prstGeom>
+          <a:solidFill>
+            <a:srgbClr val="C8A24B"/>
+          </a:solidFill>
+          <a:ln>
+            <a:noFill/>
+          </a:ln>
+          <a:effectLst/>
+        </p:spPr>
+        <p:style>
+          <a:lnRef idx="1">
+            <a:schemeClr val="accent1"/>
+          </a:lnRef>
+          <a:fillRef idx="3">
+            <a:schemeClr val="accent1"/>
+          </a:fillRef>
+          <a:effectRef idx="2">
+            <a:schemeClr val="accent1"/>
+          </a:effectRef>
+          <a:fontRef idx="minor">
+            <a:schemeClr val="lt1"/>
+          </a:fontRef>
+        </p:style>
+        <p:txBody>
+          <a:bodyPr rtlCol="0" anchor="ctr"/>
+          <a:lstStyle/>
+          <a:p/>
+        </p:txBody>
+      </p:sp>
+      <p:sp>
+        <p:nvSpPr>
+          <p:cNvPr id="13" name="TextBox 12"/>
+          <p:cNvSpPr txBox="1"/>
+          <p:nvPr/>
+        </p:nvSpPr>
+        <p:spPr>
+          <a:xfrm>
+            <a:off x="996696" y="3474720"/>
+            <a:ext cx="10417759" cy="274320"/>
+          </a:xfrm>
+          <a:prstGeom prst="rect">
+            <a:avLst/>
+          </a:prstGeom>
+          <a:noFill/>
+        </p:spPr>
+        <p:txBody>
+          <a:bodyPr wrap="square" anchor="t" lIns="0" rIns="0" tIns="0" bIns="0">
+            <a:spAutoFit/>
+          </a:bodyPr>
+          <a:lstStyle/>
+          <a:p>
+            <a:pPr algn="l">
+              <a:lnSpc>
+                <a:spcPct val="125000"/>
+              </a:lnSpc>
+            </a:pPr>
+            <a:r>
+              <a:rPr sz="1550" b="1">
+                <a:solidFill>
+                  <a:srgbClr val="1F3A5F"/>
+                </a:solidFill>
+                <a:latin typeface="Malgun Gothic"/>
+                <a:ea typeface="Malgun Gothic"/>
+                <a:cs typeface="Malgun Gothic"/>
+              </a:rPr>
+              <a:t>두 구간 교차 검증</a:t>
+            </a:r>
+          </a:p>
+        </p:txBody>
+      </p:sp>
+      <p:sp>
+        <p:nvSpPr>
+          <p:cNvPr id="14" name="TextBox 13"/>
+          <p:cNvSpPr txBox="1"/>
+          <p:nvPr/>
+        </p:nvSpPr>
+        <p:spPr>
+          <a:xfrm>
+            <a:off x="996696" y="3776472"/>
+            <a:ext cx="10417759" cy="502920"/>
+          </a:xfrm>
+          <a:prstGeom prst="rect">
+            <a:avLst/>
+          </a:prstGeom>
+          <a:noFill/>
+        </p:spPr>
+        <p:txBody>
+          <a:bodyPr wrap="square" anchor="t" lIns="0" rIns="0" tIns="0" bIns="0">
+            <a:spAutoFit/>
+          </a:bodyPr>
+          <a:lstStyle/>
+          <a:p>
+            <a:pPr algn="l">
+              <a:lnSpc>
+                <a:spcPct val="130000"/>
+              </a:lnSpc>
+            </a:pPr>
+            <a:r>
+              <a:rPr sz="1300" b="0">
+                <a:solidFill>
+                  <a:srgbClr val="44505E"/>
+                </a:solidFill>
+                <a:latin typeface="Malgun Gothic"/>
+                <a:ea typeface="Malgun Gothic"/>
+                <a:cs typeface="Malgun Gothic"/>
+              </a:rPr>
+              <a:t>2026년이라는 한 해를 통째로 빼도 Calmar 1.09로 유지·상승한다(전 구간 1.07). 같은 구간 벤치마크는 0.56 — 특정 국면에 기댄 성과가 아니다.</a:t>
+            </a:r>
+          </a:p>
+        </p:txBody>
+      </p:sp>
+      <p:sp>
+        <p:nvSpPr>
+          <p:cNvPr id="15" name="Rectangle 14"/>
+          <p:cNvSpPr/>
+          <p:nvPr/>
+        </p:nvSpPr>
+        <p:spPr>
+          <a:xfrm>
+            <a:off x="777240" y="4425696"/>
+            <a:ext cx="45720" cy="566928"/>
+          </a:xfrm>
+          <a:prstGeom prst="rect">
+            <a:avLst/>
+          </a:prstGeom>
+          <a:solidFill>
+            <a:srgbClr val="C8A24B"/>
+          </a:solidFill>
+          <a:ln>
+            <a:noFill/>
+          </a:ln>
+          <a:effectLst/>
+        </p:spPr>
+        <p:style>
+          <a:lnRef idx="1">
+            <a:schemeClr val="accent1"/>
+          </a:lnRef>
+          <a:fillRef idx="3">
+            <a:schemeClr val="accent1"/>
+          </a:fillRef>
+          <a:effectRef idx="2">
+            <a:schemeClr val="accent1"/>
+          </a:effectRef>
+          <a:fontRef idx="minor">
+            <a:schemeClr val="lt1"/>
+          </a:fontRef>
+        </p:style>
+        <p:txBody>
+          <a:bodyPr rtlCol="0" anchor="ctr"/>
+          <a:lstStyle/>
+          <a:p/>
+        </p:txBody>
+      </p:sp>
+      <p:sp>
+        <p:nvSpPr>
+          <p:cNvPr id="16" name="TextBox 15"/>
+          <p:cNvSpPr txBox="1"/>
+          <p:nvPr/>
+        </p:nvSpPr>
+        <p:spPr>
+          <a:xfrm>
+            <a:off x="996696" y="4370832"/>
+            <a:ext cx="10417759" cy="274320"/>
+          </a:xfrm>
+          <a:prstGeom prst="rect">
+            <a:avLst/>
+          </a:prstGeom>
+          <a:noFill/>
+        </p:spPr>
+        <p:txBody>
+          <a:bodyPr wrap="square" anchor="t" lIns="0" rIns="0" tIns="0" bIns="0">
+            <a:spAutoFit/>
+          </a:bodyPr>
+          <a:lstStyle/>
+          <a:p>
+            <a:pPr algn="l">
+              <a:lnSpc>
+                <a:spcPct val="125000"/>
+              </a:lnSpc>
+            </a:pPr>
+            <a:r>
+              <a:rPr sz="1550" b="1">
+                <a:solidFill>
+                  <a:srgbClr val="1F3A5F"/>
+                </a:solidFill>
+                <a:latin typeface="Malgun Gothic"/>
+                <a:ea typeface="Malgun Gothic"/>
+                <a:cs typeface="Malgun Gothic"/>
+              </a:rPr>
+              <a:t>개선 전수 탐색 후 확정</a:t>
+            </a:r>
+          </a:p>
+        </p:txBody>
+      </p:sp>
+      <p:sp>
+        <p:nvSpPr>
+          <p:cNvPr id="17" name="TextBox 16"/>
+          <p:cNvSpPr txBox="1"/>
+          <p:nvPr/>
+        </p:nvSpPr>
+        <p:spPr>
+          <a:xfrm>
+            <a:off x="996696" y="4672584"/>
+            <a:ext cx="10417759" cy="502920"/>
+          </a:xfrm>
+          <a:prstGeom prst="rect">
+            <a:avLst/>
+          </a:prstGeom>
+          <a:noFill/>
+        </p:spPr>
+        <p:txBody>
+          <a:bodyPr wrap="square" anchor="t" lIns="0" rIns="0" tIns="0" bIns="0">
+            <a:spAutoFit/>
+          </a:bodyPr>
+          <a:lstStyle/>
+          <a:p>
+            <a:pPr algn="l">
+              <a:lnSpc>
+                <a:spcPct val="130000"/>
+              </a:lnSpc>
+            </a:pPr>
+            <a:r>
+              <a:rPr sz="1300" b="0">
+                <a:solidFill>
+                  <a:srgbClr val="44505E"/>
+                </a:solidFill>
+                <a:latin typeface="Malgun Gothic"/>
+                <a:ea typeface="Malgun Gothic"/>
+                <a:cs typeface="Malgun Gothic"/>
+              </a:rPr>
+              <a:t>동결 이후 대안 8계열·11개 구성을 같은 기준으로 전수 측정 — 채택 0. "대안을 못 찾아서"가 아니라 "주변 전부를 재본 뒤" 확정된 구성이다.</a:t>
+            </a:r>
+          </a:p>
+        </p:txBody>
+      </p:sp>
+      <p:sp>
+        <p:nvSpPr>
+          <p:cNvPr id="18" name="Rectangle 17"/>
+          <p:cNvSpPr/>
+          <p:nvPr/>
+        </p:nvSpPr>
+        <p:spPr>
+          <a:xfrm>
+            <a:off x="777240" y="5321808"/>
+            <a:ext cx="45720" cy="566928"/>
+          </a:xfrm>
+          <a:prstGeom prst="rect">
+            <a:avLst/>
+          </a:prstGeom>
+          <a:solidFill>
+            <a:srgbClr val="C8A24B"/>
+          </a:solidFill>
+          <a:ln>
+            <a:noFill/>
+          </a:ln>
+          <a:effectLst/>
+        </p:spPr>
+        <p:style>
+          <a:lnRef idx="1">
+            <a:schemeClr val="accent1"/>
+          </a:lnRef>
+          <a:fillRef idx="3">
+            <a:schemeClr val="accent1"/>
+          </a:fillRef>
+          <a:effectRef idx="2">
+            <a:schemeClr val="accent1"/>
+          </a:effectRef>
+          <a:fontRef idx="minor">
+            <a:schemeClr val="lt1"/>
+          </a:fontRef>
+        </p:style>
+        <p:txBody>
+          <a:bodyPr rtlCol="0" anchor="ctr"/>
+          <a:lstStyle/>
+          <a:p/>
+        </p:txBody>
+      </p:sp>
+      <p:sp>
+        <p:nvSpPr>
+          <p:cNvPr id="19" name="TextBox 18"/>
+          <p:cNvSpPr txBox="1"/>
+          <p:nvPr/>
+        </p:nvSpPr>
+        <p:spPr>
+          <a:xfrm>
+            <a:off x="996696" y="5266944"/>
+            <a:ext cx="10417759" cy="274320"/>
+          </a:xfrm>
+          <a:prstGeom prst="rect">
+            <a:avLst/>
+          </a:prstGeom>
+          <a:noFill/>
+        </p:spPr>
+        <p:txBody>
+          <a:bodyPr wrap="square" anchor="t" lIns="0" rIns="0" tIns="0" bIns="0">
+            <a:spAutoFit/>
+          </a:bodyPr>
+          <a:lstStyle/>
+          <a:p>
+            <a:pPr algn="l">
+              <a:lnSpc>
+                <a:spcPct val="125000"/>
+              </a:lnSpc>
+            </a:pPr>
+            <a:r>
+              <a:rPr sz="1550" b="1">
+                <a:solidFill>
+                  <a:srgbClr val="1F3A5F"/>
+                </a:solidFill>
+                <a:latin typeface="Malgun Gothic"/>
+                <a:ea typeface="Malgun Gothic"/>
+                <a:cs typeface="Malgun Gothic"/>
+              </a:rPr>
+              <a:t>재현성</a:t>
+            </a:r>
+          </a:p>
+        </p:txBody>
+      </p:sp>
+      <p:sp>
+        <p:nvSpPr>
+          <p:cNvPr id="20" name="TextBox 19"/>
+          <p:cNvSpPr txBox="1"/>
+          <p:nvPr/>
+        </p:nvSpPr>
+        <p:spPr>
+          <a:xfrm>
+            <a:off x="996696" y="5568696"/>
+            <a:ext cx="10417759" cy="502920"/>
+          </a:xfrm>
+          <a:prstGeom prst="rect">
+            <a:avLst/>
+          </a:prstGeom>
+          <a:noFill/>
+        </p:spPr>
+        <p:txBody>
+          <a:bodyPr wrap="square" anchor="t" lIns="0" rIns="0" tIns="0" bIns="0">
+            <a:spAutoFit/>
+          </a:bodyPr>
+          <a:lstStyle/>
+          <a:p>
+            <a:pPr algn="l">
+              <a:lnSpc>
+                <a:spcPct val="130000"/>
+              </a:lnSpc>
+            </a:pPr>
+            <a:r>
+              <a:rPr sz="1300" b="0">
+                <a:solidFill>
+                  <a:srgbClr val="44505E"/>
+                </a:solidFill>
+                <a:latin typeface="Malgun Gothic"/>
+                <a:ea typeface="Malgun Gothic"/>
+                <a:cs typeface="Malgun Gothic"/>
+              </a:rPr>
+              <a:t>동일 커밋·동일 데이터에서 자산곡선이 그대로 재현된다. 기능 플래그 대조 실험으로 각 규칙의 기여를 개별 검증했고, 검증 32항목과 자가 발견 결함 전수를 문서로 공개한다.</a:t>
+            </a:r>
+          </a:p>
+        </p:txBody>
+      </p:sp>
+    </p:spTree>
+  </p:cSld>
+  <p:clrMapOvr>
+    <a:masterClrMapping/>
+  </p:clrMapOvr>
+</p:sld>
+</file>
+
+<file path=ppt/slides/slide16.xml><?xml version="1.0" encoding="utf-8"?>
 <p:sld xmlns:a="http://schemas.openxmlformats.org/drawingml/2006/main" xmlns:p="http://schemas.openxmlformats.org/presentationml/2006/main" xmlns:r="http://schemas.openxmlformats.org/officeDocument/2006/relationships">
   <p:cSld>
     <p:spTree>
@@ -9915,723 +10806,6 @@
 </p:sld>
 </file>
 
-<file path=ppt/slides/slide16.xml><?xml version="1.0" encoding="utf-8"?>
-<p:sld xmlns:a="http://schemas.openxmlformats.org/drawingml/2006/main" xmlns:p="http://schemas.openxmlformats.org/presentationml/2006/main" xmlns:r="http://schemas.openxmlformats.org/officeDocument/2006/relationships">
-  <p:cSld>
-    <p:spTree>
-      <p:nvGrpSpPr>
-        <p:cNvPr id="1" name=""/>
-        <p:cNvGrpSpPr/>
-        <p:nvPr/>
-      </p:nvGrpSpPr>
-      <p:grpSpPr/>
-      <p:sp>
-        <p:nvSpPr>
-          <p:cNvPr id="2" name="Rectangle 1"/>
-          <p:cNvSpPr/>
-          <p:nvPr/>
-        </p:nvSpPr>
-        <p:spPr>
-          <a:xfrm>
-            <a:off x="0" y="0"/>
-            <a:ext cx="12191695" cy="6858000"/>
-          </a:xfrm>
-          <a:prstGeom prst="rect">
-            <a:avLst/>
-          </a:prstGeom>
-          <a:solidFill>
-            <a:srgbClr val="FFFFFF"/>
-          </a:solidFill>
-          <a:ln>
-            <a:noFill/>
-          </a:ln>
-          <a:effectLst/>
-        </p:spPr>
-        <p:style>
-          <a:lnRef idx="1">
-            <a:schemeClr val="accent1"/>
-          </a:lnRef>
-          <a:fillRef idx="3">
-            <a:schemeClr val="accent1"/>
-          </a:fillRef>
-          <a:effectRef idx="2">
-            <a:schemeClr val="accent1"/>
-          </a:effectRef>
-          <a:fontRef idx="minor">
-            <a:schemeClr val="lt1"/>
-          </a:fontRef>
-        </p:style>
-        <p:txBody>
-          <a:bodyPr rtlCol="0" anchor="ctr"/>
-          <a:lstStyle/>
-          <a:p/>
-        </p:txBody>
-      </p:sp>
-      <p:sp>
-        <p:nvSpPr>
-          <p:cNvPr id="3" name="TextBox 2"/>
-          <p:cNvSpPr txBox="1"/>
-          <p:nvPr/>
-        </p:nvSpPr>
-        <p:spPr>
-          <a:xfrm>
-            <a:off x="777240" y="475488"/>
-            <a:ext cx="10637215" cy="256032"/>
-          </a:xfrm>
-          <a:prstGeom prst="rect">
-            <a:avLst/>
-          </a:prstGeom>
-          <a:noFill/>
-        </p:spPr>
-        <p:txBody>
-          <a:bodyPr wrap="square" anchor="t" lIns="0" rIns="0" tIns="0" bIns="0">
-            <a:spAutoFit/>
-          </a:bodyPr>
-          <a:lstStyle/>
-          <a:p>
-            <a:pPr algn="l">
-              <a:lnSpc>
-                <a:spcPct val="125000"/>
-              </a:lnSpc>
-            </a:pPr>
-            <a:r>
-              <a:rPr sz="1200" b="1">
-                <a:solidFill>
-                  <a:srgbClr val="C8A24B"/>
-                </a:solidFill>
-                <a:latin typeface="Malgun Gothic"/>
-                <a:ea typeface="Malgun Gothic"/>
-                <a:cs typeface="Malgun Gothic"/>
-              </a:rPr>
-              <a:t>RISK DISCLOSURE</a:t>
-            </a:r>
-          </a:p>
-        </p:txBody>
-      </p:sp>
-      <p:sp>
-        <p:nvSpPr>
-          <p:cNvPr id="4" name="TextBox 3"/>
-          <p:cNvSpPr txBox="1"/>
-          <p:nvPr/>
-        </p:nvSpPr>
-        <p:spPr>
-          <a:xfrm>
-            <a:off x="777240" y="786384"/>
-            <a:ext cx="10637215" cy="548640"/>
-          </a:xfrm>
-          <a:prstGeom prst="rect">
-            <a:avLst/>
-          </a:prstGeom>
-          <a:noFill/>
-        </p:spPr>
-        <p:txBody>
-          <a:bodyPr wrap="square" anchor="t" lIns="0" rIns="0" tIns="0" bIns="0">
-            <a:spAutoFit/>
-          </a:bodyPr>
-          <a:lstStyle/>
-          <a:p>
-            <a:pPr algn="l">
-              <a:lnSpc>
-                <a:spcPct val="125000"/>
-              </a:lnSpc>
-            </a:pPr>
-            <a:r>
-              <a:rPr sz="2700" b="1">
-                <a:solidFill>
-                  <a:srgbClr val="1F3A5F"/>
-                </a:solidFill>
-                <a:latin typeface="Malgun Gothic"/>
-                <a:ea typeface="Malgun Gothic"/>
-                <a:cs typeface="Malgun Gothic"/>
-              </a:rPr>
-              <a:t>유의사항 — 정직한 고지</a:t>
-            </a:r>
-          </a:p>
-        </p:txBody>
-      </p:sp>
-      <p:sp>
-        <p:nvSpPr>
-          <p:cNvPr id="5" name="Rectangle 4"/>
-          <p:cNvSpPr/>
-          <p:nvPr/>
-        </p:nvSpPr>
-        <p:spPr>
-          <a:xfrm>
-            <a:off x="777240" y="1444752"/>
-            <a:ext cx="10637215" cy="9525"/>
-          </a:xfrm>
-          <a:prstGeom prst="rect">
-            <a:avLst/>
-          </a:prstGeom>
-          <a:solidFill>
-            <a:srgbClr val="D8DEE6"/>
-          </a:solidFill>
-          <a:ln>
-            <a:noFill/>
-          </a:ln>
-          <a:effectLst/>
-        </p:spPr>
-        <p:style>
-          <a:lnRef idx="1">
-            <a:schemeClr val="accent1"/>
-          </a:lnRef>
-          <a:fillRef idx="3">
-            <a:schemeClr val="accent1"/>
-          </a:fillRef>
-          <a:effectRef idx="2">
-            <a:schemeClr val="accent1"/>
-          </a:effectRef>
-          <a:fontRef idx="minor">
-            <a:schemeClr val="lt1"/>
-          </a:fontRef>
-        </p:style>
-        <p:txBody>
-          <a:bodyPr rtlCol="0" anchor="ctr"/>
-          <a:lstStyle/>
-          <a:p/>
-        </p:txBody>
-      </p:sp>
-      <p:sp>
-        <p:nvSpPr>
-          <p:cNvPr id="6" name="TextBox 5"/>
-          <p:cNvSpPr txBox="1"/>
-          <p:nvPr/>
-        </p:nvSpPr>
-        <p:spPr>
-          <a:xfrm>
-            <a:off x="777240" y="1682496"/>
-            <a:ext cx="10637215" cy="365760"/>
-          </a:xfrm>
-          <a:prstGeom prst="rect">
-            <a:avLst/>
-          </a:prstGeom>
-          <a:noFill/>
-        </p:spPr>
-        <p:txBody>
-          <a:bodyPr wrap="square" anchor="t" lIns="0" rIns="0" tIns="0" bIns="0">
-            <a:spAutoFit/>
-          </a:bodyPr>
-          <a:lstStyle/>
-          <a:p>
-            <a:pPr algn="l">
-              <a:lnSpc>
-                <a:spcPct val="125000"/>
-              </a:lnSpc>
-            </a:pPr>
-            <a:r>
-              <a:rPr sz="1800" b="1">
-                <a:solidFill>
-                  <a:srgbClr val="1F3A5F"/>
-                </a:solidFill>
-                <a:latin typeface="Malgun Gothic"/>
-                <a:ea typeface="Malgun Gothic"/>
-                <a:cs typeface="Malgun Gothic"/>
-              </a:rPr>
-              <a:t>이 상품이 못하는 것을 먼저 말한다.</a:t>
-            </a:r>
-          </a:p>
-        </p:txBody>
-      </p:sp>
-      <p:sp>
-        <p:nvSpPr>
-          <p:cNvPr id="7" name="TextBox 6"/>
-          <p:cNvSpPr txBox="1"/>
-          <p:nvPr/>
-        </p:nvSpPr>
-        <p:spPr>
-          <a:xfrm>
-            <a:off x="777240" y="2249424"/>
-            <a:ext cx="365760" cy="274320"/>
-          </a:xfrm>
-          <a:prstGeom prst="rect">
-            <a:avLst/>
-          </a:prstGeom>
-          <a:noFill/>
-        </p:spPr>
-        <p:txBody>
-          <a:bodyPr wrap="square" anchor="t" lIns="0" rIns="0" tIns="0" bIns="0">
-            <a:spAutoFit/>
-          </a:bodyPr>
-          <a:lstStyle/>
-          <a:p>
-            <a:pPr algn="l">
-              <a:lnSpc>
-                <a:spcPct val="125000"/>
-              </a:lnSpc>
-            </a:pPr>
-            <a:r>
-              <a:rPr sz="1500" b="1">
-                <a:solidFill>
-                  <a:srgbClr val="C8A24B"/>
-                </a:solidFill>
-                <a:latin typeface="Malgun Gothic"/>
-                <a:ea typeface="Malgun Gothic"/>
-                <a:cs typeface="Malgun Gothic"/>
-              </a:rPr>
-              <a:t>1</a:t>
-            </a:r>
-          </a:p>
-        </p:txBody>
-      </p:sp>
-      <p:sp>
-        <p:nvSpPr>
-          <p:cNvPr id="8" name="TextBox 7"/>
-          <p:cNvSpPr txBox="1"/>
-          <p:nvPr/>
-        </p:nvSpPr>
-        <p:spPr>
-          <a:xfrm>
-            <a:off x="1161288" y="2249424"/>
-            <a:ext cx="10253167" cy="566928"/>
-          </a:xfrm>
-          <a:prstGeom prst="rect">
-            <a:avLst/>
-          </a:prstGeom>
-          <a:noFill/>
-        </p:spPr>
-        <p:txBody>
-          <a:bodyPr wrap="square" anchor="t" lIns="0" rIns="0" tIns="0" bIns="0">
-            <a:spAutoFit/>
-          </a:bodyPr>
-          <a:lstStyle/>
-          <a:p>
-            <a:pPr algn="l">
-              <a:lnSpc>
-                <a:spcPct val="130000"/>
-              </a:lnSpc>
-            </a:pPr>
-            <a:r>
-              <a:rPr sz="1350" b="0">
-                <a:solidFill>
-                  <a:srgbClr val="44505E"/>
-                </a:solidFill>
-                <a:latin typeface="Malgun Gothic"/>
-                <a:ea typeface="Malgun Gothic"/>
-                <a:cs typeface="Malgun Gothic"/>
-              </a:rPr>
-              <a:t>원금 비보장 실적배당형이며, 백테스트는 미래 수익을 보장하지 않는다.</a:t>
-            </a:r>
-          </a:p>
-        </p:txBody>
-      </p:sp>
-      <p:sp>
-        <p:nvSpPr>
-          <p:cNvPr id="9" name="TextBox 8"/>
-          <p:cNvSpPr txBox="1"/>
-          <p:nvPr/>
-        </p:nvSpPr>
-        <p:spPr>
-          <a:xfrm>
-            <a:off x="777240" y="2907792"/>
-            <a:ext cx="365760" cy="274320"/>
-          </a:xfrm>
-          <a:prstGeom prst="rect">
-            <a:avLst/>
-          </a:prstGeom>
-          <a:noFill/>
-        </p:spPr>
-        <p:txBody>
-          <a:bodyPr wrap="square" anchor="t" lIns="0" rIns="0" tIns="0" bIns="0">
-            <a:spAutoFit/>
-          </a:bodyPr>
-          <a:lstStyle/>
-          <a:p>
-            <a:pPr algn="l">
-              <a:lnSpc>
-                <a:spcPct val="125000"/>
-              </a:lnSpc>
-            </a:pPr>
-            <a:r>
-              <a:rPr sz="1500" b="1">
-                <a:solidFill>
-                  <a:srgbClr val="C8A24B"/>
-                </a:solidFill>
-                <a:latin typeface="Malgun Gothic"/>
-                <a:ea typeface="Malgun Gothic"/>
-                <a:cs typeface="Malgun Gothic"/>
-              </a:rPr>
-              <a:t>2</a:t>
-            </a:r>
-          </a:p>
-        </p:txBody>
-      </p:sp>
-      <p:sp>
-        <p:nvSpPr>
-          <p:cNvPr id="10" name="TextBox 9"/>
-          <p:cNvSpPr txBox="1"/>
-          <p:nvPr/>
-        </p:nvSpPr>
-        <p:spPr>
-          <a:xfrm>
-            <a:off x="1161288" y="2907792"/>
-            <a:ext cx="10253167" cy="566928"/>
-          </a:xfrm>
-          <a:prstGeom prst="rect">
-            <a:avLst/>
-          </a:prstGeom>
-          <a:noFill/>
-        </p:spPr>
-        <p:txBody>
-          <a:bodyPr wrap="square" anchor="t" lIns="0" rIns="0" tIns="0" bIns="0">
-            <a:spAutoFit/>
-          </a:bodyPr>
-          <a:lstStyle/>
-          <a:p>
-            <a:pPr algn="l">
-              <a:lnSpc>
-                <a:spcPct val="130000"/>
-              </a:lnSpc>
-            </a:pPr>
-            <a:r>
-              <a:rPr sz="1350" b="0">
-                <a:solidFill>
-                  <a:srgbClr val="44505E"/>
-                </a:solidFill>
-                <a:latin typeface="Malgun Gothic"/>
-                <a:ea typeface="Malgun Gothic"/>
-                <a:cs typeface="Malgun Gothic"/>
-              </a:rPr>
-              <a:t>7년 중 4년은 벤치마크보다 덜 벌었다. 매년 이기는 상품이 아니라, 평시에 보험료를 내고 위기에 보험금을 받는 상품이다.</a:t>
-            </a:r>
-          </a:p>
-        </p:txBody>
-      </p:sp>
-      <p:sp>
-        <p:nvSpPr>
-          <p:cNvPr id="11" name="TextBox 10"/>
-          <p:cNvSpPr txBox="1"/>
-          <p:nvPr/>
-        </p:nvSpPr>
-        <p:spPr>
-          <a:xfrm>
-            <a:off x="777240" y="3566160"/>
-            <a:ext cx="365760" cy="274320"/>
-          </a:xfrm>
-          <a:prstGeom prst="rect">
-            <a:avLst/>
-          </a:prstGeom>
-          <a:noFill/>
-        </p:spPr>
-        <p:txBody>
-          <a:bodyPr wrap="square" anchor="t" lIns="0" rIns="0" tIns="0" bIns="0">
-            <a:spAutoFit/>
-          </a:bodyPr>
-          <a:lstStyle/>
-          <a:p>
-            <a:pPr algn="l">
-              <a:lnSpc>
-                <a:spcPct val="125000"/>
-              </a:lnSpc>
-            </a:pPr>
-            <a:r>
-              <a:rPr sz="1500" b="1">
-                <a:solidFill>
-                  <a:srgbClr val="C8A24B"/>
-                </a:solidFill>
-                <a:latin typeface="Malgun Gothic"/>
-                <a:ea typeface="Malgun Gothic"/>
-                <a:cs typeface="Malgun Gothic"/>
-              </a:rPr>
-              <a:t>3</a:t>
-            </a:r>
-          </a:p>
-        </p:txBody>
-      </p:sp>
-      <p:sp>
-        <p:nvSpPr>
-          <p:cNvPr id="12" name="TextBox 11"/>
-          <p:cNvSpPr txBox="1"/>
-          <p:nvPr/>
-        </p:nvSpPr>
-        <p:spPr>
-          <a:xfrm>
-            <a:off x="1161288" y="3566160"/>
-            <a:ext cx="10253167" cy="566928"/>
-          </a:xfrm>
-          <a:prstGeom prst="rect">
-            <a:avLst/>
-          </a:prstGeom>
-          <a:noFill/>
-        </p:spPr>
-        <p:txBody>
-          <a:bodyPr wrap="square" anchor="t" lIns="0" rIns="0" tIns="0" bIns="0">
-            <a:spAutoFit/>
-          </a:bodyPr>
-          <a:lstStyle/>
-          <a:p>
-            <a:pPr algn="l">
-              <a:lnSpc>
-                <a:spcPct val="130000"/>
-              </a:lnSpc>
-            </a:pPr>
-            <a:r>
-              <a:rPr sz="1350" b="0">
-                <a:solidFill>
-                  <a:srgbClr val="44505E"/>
-                </a:solidFill>
-                <a:latin typeface="Malgun Gothic"/>
-                <a:ea typeface="Malgun Gothic"/>
-                <a:cs typeface="Malgun Gothic"/>
-              </a:rPr>
-              <a:t>급반전(V자) 국면에 구조적으로 후행한다 — 추세 확인 후 진입하므로 반등 초입 일부를 포기한다. 2023년 벤치마크 대비 −14.1%p 가 이 약점의 최대 실측치다.</a:t>
-            </a:r>
-          </a:p>
-        </p:txBody>
-      </p:sp>
-      <p:sp>
-        <p:nvSpPr>
-          <p:cNvPr id="13" name="TextBox 12"/>
-          <p:cNvSpPr txBox="1"/>
-          <p:nvPr/>
-        </p:nvSpPr>
-        <p:spPr>
-          <a:xfrm>
-            <a:off x="777240" y="4224528"/>
-            <a:ext cx="365760" cy="274320"/>
-          </a:xfrm>
-          <a:prstGeom prst="rect">
-            <a:avLst/>
-          </a:prstGeom>
-          <a:noFill/>
-        </p:spPr>
-        <p:txBody>
-          <a:bodyPr wrap="square" anchor="t" lIns="0" rIns="0" tIns="0" bIns="0">
-            <a:spAutoFit/>
-          </a:bodyPr>
-          <a:lstStyle/>
-          <a:p>
-            <a:pPr algn="l">
-              <a:lnSpc>
-                <a:spcPct val="125000"/>
-              </a:lnSpc>
-            </a:pPr>
-            <a:r>
-              <a:rPr sz="1500" b="1">
-                <a:solidFill>
-                  <a:srgbClr val="C8A24B"/>
-                </a:solidFill>
-                <a:latin typeface="Malgun Gothic"/>
-                <a:ea typeface="Malgun Gothic"/>
-                <a:cs typeface="Malgun Gothic"/>
-              </a:rPr>
-              <a:t>4</a:t>
-            </a:r>
-          </a:p>
-        </p:txBody>
-      </p:sp>
-      <p:sp>
-        <p:nvSpPr>
-          <p:cNvPr id="14" name="TextBox 13"/>
-          <p:cNvSpPr txBox="1"/>
-          <p:nvPr/>
-        </p:nvSpPr>
-        <p:spPr>
-          <a:xfrm>
-            <a:off x="1161288" y="4224528"/>
-            <a:ext cx="10253167" cy="566928"/>
-          </a:xfrm>
-          <a:prstGeom prst="rect">
-            <a:avLst/>
-          </a:prstGeom>
-          <a:noFill/>
-        </p:spPr>
-        <p:txBody>
-          <a:bodyPr wrap="square" anchor="t" lIns="0" rIns="0" tIns="0" bIns="0">
-            <a:spAutoFit/>
-          </a:bodyPr>
-          <a:lstStyle/>
-          <a:p>
-            <a:pPr algn="l">
-              <a:lnSpc>
-                <a:spcPct val="130000"/>
-              </a:lnSpc>
-            </a:pPr>
-            <a:r>
-              <a:rPr sz="1350" b="0">
-                <a:solidFill>
-                  <a:srgbClr val="44505E"/>
-                </a:solidFill>
-                <a:latin typeface="Malgun Gothic"/>
-                <a:ea typeface="Malgun Gothic"/>
-                <a:cs typeface="Malgun Gothic"/>
-              </a:rPr>
-              <a:t>백테스트는 6.5년(해외 ETF 상장 시점 한계)이며, 유니버스는 현존 종목 기준이라 생존편향 가능성이 있다.</a:t>
-            </a:r>
-          </a:p>
-        </p:txBody>
-      </p:sp>
-      <p:sp>
-        <p:nvSpPr>
-          <p:cNvPr id="15" name="TextBox 14"/>
-          <p:cNvSpPr txBox="1"/>
-          <p:nvPr/>
-        </p:nvSpPr>
-        <p:spPr>
-          <a:xfrm>
-            <a:off x="777240" y="4882896"/>
-            <a:ext cx="365760" cy="274320"/>
-          </a:xfrm>
-          <a:prstGeom prst="rect">
-            <a:avLst/>
-          </a:prstGeom>
-          <a:noFill/>
-        </p:spPr>
-        <p:txBody>
-          <a:bodyPr wrap="square" anchor="t" lIns="0" rIns="0" tIns="0" bIns="0">
-            <a:spAutoFit/>
-          </a:bodyPr>
-          <a:lstStyle/>
-          <a:p>
-            <a:pPr algn="l">
-              <a:lnSpc>
-                <a:spcPct val="125000"/>
-              </a:lnSpc>
-            </a:pPr>
-            <a:r>
-              <a:rPr sz="1500" b="1">
-                <a:solidFill>
-                  <a:srgbClr val="C8A24B"/>
-                </a:solidFill>
-                <a:latin typeface="Malgun Gothic"/>
-                <a:ea typeface="Malgun Gothic"/>
-                <a:cs typeface="Malgun Gothic"/>
-              </a:rPr>
-              <a:t>5</a:t>
-            </a:r>
-          </a:p>
-        </p:txBody>
-      </p:sp>
-      <p:sp>
-        <p:nvSpPr>
-          <p:cNvPr id="16" name="TextBox 15"/>
-          <p:cNvSpPr txBox="1"/>
-          <p:nvPr/>
-        </p:nvSpPr>
-        <p:spPr>
-          <a:xfrm>
-            <a:off x="1161288" y="4882896"/>
-            <a:ext cx="10253167" cy="566928"/>
-          </a:xfrm>
-          <a:prstGeom prst="rect">
-            <a:avLst/>
-          </a:prstGeom>
-          <a:noFill/>
-        </p:spPr>
-        <p:txBody>
-          <a:bodyPr wrap="square" anchor="t" lIns="0" rIns="0" tIns="0" bIns="0">
-            <a:spAutoFit/>
-          </a:bodyPr>
-          <a:lstStyle/>
-          <a:p>
-            <a:pPr algn="l">
-              <a:lnSpc>
-                <a:spcPct val="130000"/>
-              </a:lnSpc>
-            </a:pPr>
-            <a:r>
-              <a:rPr sz="1350" b="0">
-                <a:solidFill>
-                  <a:srgbClr val="44505E"/>
-                </a:solidFill>
-                <a:latin typeface="Malgun Gothic"/>
-                <a:ea typeface="Malgun Gothic"/>
-                <a:cs typeface="Malgun Gothic"/>
-              </a:rPr>
-              <a:t>세금·슬리피지 미반영(세전).</a:t>
-            </a:r>
-          </a:p>
-        </p:txBody>
-      </p:sp>
-      <p:sp>
-        <p:nvSpPr>
-          <p:cNvPr id="17" name="TextBox 16"/>
-          <p:cNvSpPr txBox="1"/>
-          <p:nvPr/>
-        </p:nvSpPr>
-        <p:spPr>
-          <a:xfrm>
-            <a:off x="777240" y="5541263"/>
-            <a:ext cx="365760" cy="274320"/>
-          </a:xfrm>
-          <a:prstGeom prst="rect">
-            <a:avLst/>
-          </a:prstGeom>
-          <a:noFill/>
-        </p:spPr>
-        <p:txBody>
-          <a:bodyPr wrap="square" anchor="t" lIns="0" rIns="0" tIns="0" bIns="0">
-            <a:spAutoFit/>
-          </a:bodyPr>
-          <a:lstStyle/>
-          <a:p>
-            <a:pPr algn="l">
-              <a:lnSpc>
-                <a:spcPct val="125000"/>
-              </a:lnSpc>
-            </a:pPr>
-            <a:r>
-              <a:rPr sz="1500" b="1">
-                <a:solidFill>
-                  <a:srgbClr val="C8A24B"/>
-                </a:solidFill>
-                <a:latin typeface="Malgun Gothic"/>
-                <a:ea typeface="Malgun Gothic"/>
-                <a:cs typeface="Malgun Gothic"/>
-              </a:rPr>
-              <a:t>6</a:t>
-            </a:r>
-          </a:p>
-        </p:txBody>
-      </p:sp>
-      <p:sp>
-        <p:nvSpPr>
-          <p:cNvPr id="18" name="TextBox 17"/>
-          <p:cNvSpPr txBox="1"/>
-          <p:nvPr/>
-        </p:nvSpPr>
-        <p:spPr>
-          <a:xfrm>
-            <a:off x="1161288" y="5541263"/>
-            <a:ext cx="10253167" cy="566928"/>
-          </a:xfrm>
-          <a:prstGeom prst="rect">
-            <a:avLst/>
-          </a:prstGeom>
-          <a:noFill/>
-        </p:spPr>
-        <p:txBody>
-          <a:bodyPr wrap="square" anchor="t" lIns="0" rIns="0" tIns="0" bIns="0">
-            <a:spAutoFit/>
-          </a:bodyPr>
-          <a:lstStyle/>
-          <a:p>
-            <a:pPr algn="l">
-              <a:lnSpc>
-                <a:spcPct val="130000"/>
-              </a:lnSpc>
-            </a:pPr>
-            <a:r>
-              <a:rPr sz="1350" b="0">
-                <a:solidFill>
-                  <a:srgbClr val="44505E"/>
-                </a:solidFill>
-                <a:latin typeface="Malgun Gothic"/>
-                <a:ea typeface="Malgun Gothic"/>
-                <a:cs typeface="Malgun Gothic"/>
-              </a:rPr>
-              <a:t>규제 정합 설계 — 위험자산 비중을 상시 70% 이하로 스스로 제한한다. IRP 계좌의 위험자산 70% 한도와 같은 선을 상품 내부에 둬, 가입자가 계좌를 이 상품 하나로 채워도 한도를 넘지 않는다.</a:t>
-            </a:r>
-          </a:p>
-        </p:txBody>
-      </p:sp>
-    </p:spTree>
-  </p:cSld>
-  <p:clrMapOvr>
-    <a:masterClrMapping/>
-  </p:clrMapOvr>
-</p:sld>
-</file>
-
 <file path=ppt/slides/slide17.xml><?xml version="1.0" encoding="utf-8"?>
 <p:sld xmlns:a="http://schemas.openxmlformats.org/drawingml/2006/main" xmlns:p="http://schemas.openxmlformats.org/presentationml/2006/main" xmlns:r="http://schemas.openxmlformats.org/officeDocument/2006/relationships">
   <p:cSld>
@@ -10720,7 +10894,7 @@
                 <a:ea typeface="Malgun Gothic"/>
                 <a:cs typeface="Malgun Gothic"/>
               </a:rPr>
-              <a:t>PRODUCT SUMMARY</a:t>
+              <a:t>RISK DISCLOSURE</a:t>
             </a:r>
           </a:p>
         </p:txBody>
@@ -10761,7 +10935,7 @@
                 <a:ea typeface="Malgun Gothic"/>
                 <a:cs typeface="Malgun Gothic"/>
               </a:rPr>
-              <a:t>상품 개요</a:t>
+              <a:t>유의사항 — 정직한 고지</a:t>
             </a:r>
           </a:p>
         </p:txBody>
@@ -10808,6 +10982,723 @@
           <a:p/>
         </p:txBody>
       </p:sp>
+      <p:sp>
+        <p:nvSpPr>
+          <p:cNvPr id="6" name="TextBox 5"/>
+          <p:cNvSpPr txBox="1"/>
+          <p:nvPr/>
+        </p:nvSpPr>
+        <p:spPr>
+          <a:xfrm>
+            <a:off x="777240" y="1682496"/>
+            <a:ext cx="10637215" cy="365760"/>
+          </a:xfrm>
+          <a:prstGeom prst="rect">
+            <a:avLst/>
+          </a:prstGeom>
+          <a:noFill/>
+        </p:spPr>
+        <p:txBody>
+          <a:bodyPr wrap="square" anchor="t" lIns="0" rIns="0" tIns="0" bIns="0">
+            <a:spAutoFit/>
+          </a:bodyPr>
+          <a:lstStyle/>
+          <a:p>
+            <a:pPr algn="l">
+              <a:lnSpc>
+                <a:spcPct val="125000"/>
+              </a:lnSpc>
+            </a:pPr>
+            <a:r>
+              <a:rPr sz="1800" b="1">
+                <a:solidFill>
+                  <a:srgbClr val="1F3A5F"/>
+                </a:solidFill>
+                <a:latin typeface="Malgun Gothic"/>
+                <a:ea typeface="Malgun Gothic"/>
+                <a:cs typeface="Malgun Gothic"/>
+              </a:rPr>
+              <a:t>이 상품이 못하는 것을 먼저 말한다.</a:t>
+            </a:r>
+          </a:p>
+        </p:txBody>
+      </p:sp>
+      <p:sp>
+        <p:nvSpPr>
+          <p:cNvPr id="7" name="TextBox 6"/>
+          <p:cNvSpPr txBox="1"/>
+          <p:nvPr/>
+        </p:nvSpPr>
+        <p:spPr>
+          <a:xfrm>
+            <a:off x="777240" y="2249424"/>
+            <a:ext cx="365760" cy="274320"/>
+          </a:xfrm>
+          <a:prstGeom prst="rect">
+            <a:avLst/>
+          </a:prstGeom>
+          <a:noFill/>
+        </p:spPr>
+        <p:txBody>
+          <a:bodyPr wrap="square" anchor="t" lIns="0" rIns="0" tIns="0" bIns="0">
+            <a:spAutoFit/>
+          </a:bodyPr>
+          <a:lstStyle/>
+          <a:p>
+            <a:pPr algn="l">
+              <a:lnSpc>
+                <a:spcPct val="125000"/>
+              </a:lnSpc>
+            </a:pPr>
+            <a:r>
+              <a:rPr sz="1500" b="1">
+                <a:solidFill>
+                  <a:srgbClr val="C8A24B"/>
+                </a:solidFill>
+                <a:latin typeface="Malgun Gothic"/>
+                <a:ea typeface="Malgun Gothic"/>
+                <a:cs typeface="Malgun Gothic"/>
+              </a:rPr>
+              <a:t>1</a:t>
+            </a:r>
+          </a:p>
+        </p:txBody>
+      </p:sp>
+      <p:sp>
+        <p:nvSpPr>
+          <p:cNvPr id="8" name="TextBox 7"/>
+          <p:cNvSpPr txBox="1"/>
+          <p:nvPr/>
+        </p:nvSpPr>
+        <p:spPr>
+          <a:xfrm>
+            <a:off x="1161288" y="2249424"/>
+            <a:ext cx="10253167" cy="566928"/>
+          </a:xfrm>
+          <a:prstGeom prst="rect">
+            <a:avLst/>
+          </a:prstGeom>
+          <a:noFill/>
+        </p:spPr>
+        <p:txBody>
+          <a:bodyPr wrap="square" anchor="t" lIns="0" rIns="0" tIns="0" bIns="0">
+            <a:spAutoFit/>
+          </a:bodyPr>
+          <a:lstStyle/>
+          <a:p>
+            <a:pPr algn="l">
+              <a:lnSpc>
+                <a:spcPct val="130000"/>
+              </a:lnSpc>
+            </a:pPr>
+            <a:r>
+              <a:rPr sz="1350" b="0">
+                <a:solidFill>
+                  <a:srgbClr val="44505E"/>
+                </a:solidFill>
+                <a:latin typeface="Malgun Gothic"/>
+                <a:ea typeface="Malgun Gothic"/>
+                <a:cs typeface="Malgun Gothic"/>
+              </a:rPr>
+              <a:t>원금 비보장 실적배당형이며, 백테스트는 미래 수익을 보장하지 않는다.</a:t>
+            </a:r>
+          </a:p>
+        </p:txBody>
+      </p:sp>
+      <p:sp>
+        <p:nvSpPr>
+          <p:cNvPr id="9" name="TextBox 8"/>
+          <p:cNvSpPr txBox="1"/>
+          <p:nvPr/>
+        </p:nvSpPr>
+        <p:spPr>
+          <a:xfrm>
+            <a:off x="777240" y="2907792"/>
+            <a:ext cx="365760" cy="274320"/>
+          </a:xfrm>
+          <a:prstGeom prst="rect">
+            <a:avLst/>
+          </a:prstGeom>
+          <a:noFill/>
+        </p:spPr>
+        <p:txBody>
+          <a:bodyPr wrap="square" anchor="t" lIns="0" rIns="0" tIns="0" bIns="0">
+            <a:spAutoFit/>
+          </a:bodyPr>
+          <a:lstStyle/>
+          <a:p>
+            <a:pPr algn="l">
+              <a:lnSpc>
+                <a:spcPct val="125000"/>
+              </a:lnSpc>
+            </a:pPr>
+            <a:r>
+              <a:rPr sz="1500" b="1">
+                <a:solidFill>
+                  <a:srgbClr val="C8A24B"/>
+                </a:solidFill>
+                <a:latin typeface="Malgun Gothic"/>
+                <a:ea typeface="Malgun Gothic"/>
+                <a:cs typeface="Malgun Gothic"/>
+              </a:rPr>
+              <a:t>2</a:t>
+            </a:r>
+          </a:p>
+        </p:txBody>
+      </p:sp>
+      <p:sp>
+        <p:nvSpPr>
+          <p:cNvPr id="10" name="TextBox 9"/>
+          <p:cNvSpPr txBox="1"/>
+          <p:nvPr/>
+        </p:nvSpPr>
+        <p:spPr>
+          <a:xfrm>
+            <a:off x="1161288" y="2907792"/>
+            <a:ext cx="10253167" cy="566928"/>
+          </a:xfrm>
+          <a:prstGeom prst="rect">
+            <a:avLst/>
+          </a:prstGeom>
+          <a:noFill/>
+        </p:spPr>
+        <p:txBody>
+          <a:bodyPr wrap="square" anchor="t" lIns="0" rIns="0" tIns="0" bIns="0">
+            <a:spAutoFit/>
+          </a:bodyPr>
+          <a:lstStyle/>
+          <a:p>
+            <a:pPr algn="l">
+              <a:lnSpc>
+                <a:spcPct val="130000"/>
+              </a:lnSpc>
+            </a:pPr>
+            <a:r>
+              <a:rPr sz="1350" b="0">
+                <a:solidFill>
+                  <a:srgbClr val="44505E"/>
+                </a:solidFill>
+                <a:latin typeface="Malgun Gothic"/>
+                <a:ea typeface="Malgun Gothic"/>
+                <a:cs typeface="Malgun Gothic"/>
+              </a:rPr>
+              <a:t>7년 중 4년은 벤치마크보다 덜 벌었다. 매년 이기는 상품이 아니라, 평시에 보험료를 내고 위기에 보험금을 받는 상품이다.</a:t>
+            </a:r>
+          </a:p>
+        </p:txBody>
+      </p:sp>
+      <p:sp>
+        <p:nvSpPr>
+          <p:cNvPr id="11" name="TextBox 10"/>
+          <p:cNvSpPr txBox="1"/>
+          <p:nvPr/>
+        </p:nvSpPr>
+        <p:spPr>
+          <a:xfrm>
+            <a:off x="777240" y="3566160"/>
+            <a:ext cx="365760" cy="274320"/>
+          </a:xfrm>
+          <a:prstGeom prst="rect">
+            <a:avLst/>
+          </a:prstGeom>
+          <a:noFill/>
+        </p:spPr>
+        <p:txBody>
+          <a:bodyPr wrap="square" anchor="t" lIns="0" rIns="0" tIns="0" bIns="0">
+            <a:spAutoFit/>
+          </a:bodyPr>
+          <a:lstStyle/>
+          <a:p>
+            <a:pPr algn="l">
+              <a:lnSpc>
+                <a:spcPct val="125000"/>
+              </a:lnSpc>
+            </a:pPr>
+            <a:r>
+              <a:rPr sz="1500" b="1">
+                <a:solidFill>
+                  <a:srgbClr val="C8A24B"/>
+                </a:solidFill>
+                <a:latin typeface="Malgun Gothic"/>
+                <a:ea typeface="Malgun Gothic"/>
+                <a:cs typeface="Malgun Gothic"/>
+              </a:rPr>
+              <a:t>3</a:t>
+            </a:r>
+          </a:p>
+        </p:txBody>
+      </p:sp>
+      <p:sp>
+        <p:nvSpPr>
+          <p:cNvPr id="12" name="TextBox 11"/>
+          <p:cNvSpPr txBox="1"/>
+          <p:nvPr/>
+        </p:nvSpPr>
+        <p:spPr>
+          <a:xfrm>
+            <a:off x="1161288" y="3566160"/>
+            <a:ext cx="10253167" cy="566928"/>
+          </a:xfrm>
+          <a:prstGeom prst="rect">
+            <a:avLst/>
+          </a:prstGeom>
+          <a:noFill/>
+        </p:spPr>
+        <p:txBody>
+          <a:bodyPr wrap="square" anchor="t" lIns="0" rIns="0" tIns="0" bIns="0">
+            <a:spAutoFit/>
+          </a:bodyPr>
+          <a:lstStyle/>
+          <a:p>
+            <a:pPr algn="l">
+              <a:lnSpc>
+                <a:spcPct val="130000"/>
+              </a:lnSpc>
+            </a:pPr>
+            <a:r>
+              <a:rPr sz="1350" b="0">
+                <a:solidFill>
+                  <a:srgbClr val="44505E"/>
+                </a:solidFill>
+                <a:latin typeface="Malgun Gothic"/>
+                <a:ea typeface="Malgun Gothic"/>
+                <a:cs typeface="Malgun Gothic"/>
+              </a:rPr>
+              <a:t>급반전(V자) 국면에 구조적으로 후행한다 — 추세 확인 후 진입하므로 반등 초입 일부를 포기한다. 2023년 벤치마크 대비 −14.1%p 가 이 약점의 최대 실측치다.</a:t>
+            </a:r>
+          </a:p>
+        </p:txBody>
+      </p:sp>
+      <p:sp>
+        <p:nvSpPr>
+          <p:cNvPr id="13" name="TextBox 12"/>
+          <p:cNvSpPr txBox="1"/>
+          <p:nvPr/>
+        </p:nvSpPr>
+        <p:spPr>
+          <a:xfrm>
+            <a:off x="777240" y="4224528"/>
+            <a:ext cx="365760" cy="274320"/>
+          </a:xfrm>
+          <a:prstGeom prst="rect">
+            <a:avLst/>
+          </a:prstGeom>
+          <a:noFill/>
+        </p:spPr>
+        <p:txBody>
+          <a:bodyPr wrap="square" anchor="t" lIns="0" rIns="0" tIns="0" bIns="0">
+            <a:spAutoFit/>
+          </a:bodyPr>
+          <a:lstStyle/>
+          <a:p>
+            <a:pPr algn="l">
+              <a:lnSpc>
+                <a:spcPct val="125000"/>
+              </a:lnSpc>
+            </a:pPr>
+            <a:r>
+              <a:rPr sz="1500" b="1">
+                <a:solidFill>
+                  <a:srgbClr val="C8A24B"/>
+                </a:solidFill>
+                <a:latin typeface="Malgun Gothic"/>
+                <a:ea typeface="Malgun Gothic"/>
+                <a:cs typeface="Malgun Gothic"/>
+              </a:rPr>
+              <a:t>4</a:t>
+            </a:r>
+          </a:p>
+        </p:txBody>
+      </p:sp>
+      <p:sp>
+        <p:nvSpPr>
+          <p:cNvPr id="14" name="TextBox 13"/>
+          <p:cNvSpPr txBox="1"/>
+          <p:nvPr/>
+        </p:nvSpPr>
+        <p:spPr>
+          <a:xfrm>
+            <a:off x="1161288" y="4224528"/>
+            <a:ext cx="10253167" cy="566928"/>
+          </a:xfrm>
+          <a:prstGeom prst="rect">
+            <a:avLst/>
+          </a:prstGeom>
+          <a:noFill/>
+        </p:spPr>
+        <p:txBody>
+          <a:bodyPr wrap="square" anchor="t" lIns="0" rIns="0" tIns="0" bIns="0">
+            <a:spAutoFit/>
+          </a:bodyPr>
+          <a:lstStyle/>
+          <a:p>
+            <a:pPr algn="l">
+              <a:lnSpc>
+                <a:spcPct val="130000"/>
+              </a:lnSpc>
+            </a:pPr>
+            <a:r>
+              <a:rPr sz="1350" b="0">
+                <a:solidFill>
+                  <a:srgbClr val="44505E"/>
+                </a:solidFill>
+                <a:latin typeface="Malgun Gothic"/>
+                <a:ea typeface="Malgun Gothic"/>
+                <a:cs typeface="Malgun Gothic"/>
+              </a:rPr>
+              <a:t>백테스트는 6.5년(해외 ETF 상장 시점 한계)이며, 유니버스는 현존 종목 기준이라 생존편향 가능성이 있다.</a:t>
+            </a:r>
+          </a:p>
+        </p:txBody>
+      </p:sp>
+      <p:sp>
+        <p:nvSpPr>
+          <p:cNvPr id="15" name="TextBox 14"/>
+          <p:cNvSpPr txBox="1"/>
+          <p:nvPr/>
+        </p:nvSpPr>
+        <p:spPr>
+          <a:xfrm>
+            <a:off x="777240" y="4882896"/>
+            <a:ext cx="365760" cy="274320"/>
+          </a:xfrm>
+          <a:prstGeom prst="rect">
+            <a:avLst/>
+          </a:prstGeom>
+          <a:noFill/>
+        </p:spPr>
+        <p:txBody>
+          <a:bodyPr wrap="square" anchor="t" lIns="0" rIns="0" tIns="0" bIns="0">
+            <a:spAutoFit/>
+          </a:bodyPr>
+          <a:lstStyle/>
+          <a:p>
+            <a:pPr algn="l">
+              <a:lnSpc>
+                <a:spcPct val="125000"/>
+              </a:lnSpc>
+            </a:pPr>
+            <a:r>
+              <a:rPr sz="1500" b="1">
+                <a:solidFill>
+                  <a:srgbClr val="C8A24B"/>
+                </a:solidFill>
+                <a:latin typeface="Malgun Gothic"/>
+                <a:ea typeface="Malgun Gothic"/>
+                <a:cs typeface="Malgun Gothic"/>
+              </a:rPr>
+              <a:t>5</a:t>
+            </a:r>
+          </a:p>
+        </p:txBody>
+      </p:sp>
+      <p:sp>
+        <p:nvSpPr>
+          <p:cNvPr id="16" name="TextBox 15"/>
+          <p:cNvSpPr txBox="1"/>
+          <p:nvPr/>
+        </p:nvSpPr>
+        <p:spPr>
+          <a:xfrm>
+            <a:off x="1161288" y="4882896"/>
+            <a:ext cx="10253167" cy="566928"/>
+          </a:xfrm>
+          <a:prstGeom prst="rect">
+            <a:avLst/>
+          </a:prstGeom>
+          <a:noFill/>
+        </p:spPr>
+        <p:txBody>
+          <a:bodyPr wrap="square" anchor="t" lIns="0" rIns="0" tIns="0" bIns="0">
+            <a:spAutoFit/>
+          </a:bodyPr>
+          <a:lstStyle/>
+          <a:p>
+            <a:pPr algn="l">
+              <a:lnSpc>
+                <a:spcPct val="130000"/>
+              </a:lnSpc>
+            </a:pPr>
+            <a:r>
+              <a:rPr sz="1350" b="0">
+                <a:solidFill>
+                  <a:srgbClr val="44505E"/>
+                </a:solidFill>
+                <a:latin typeface="Malgun Gothic"/>
+                <a:ea typeface="Malgun Gothic"/>
+                <a:cs typeface="Malgun Gothic"/>
+              </a:rPr>
+              <a:t>세금·슬리피지 미반영(세전).</a:t>
+            </a:r>
+          </a:p>
+        </p:txBody>
+      </p:sp>
+      <p:sp>
+        <p:nvSpPr>
+          <p:cNvPr id="17" name="TextBox 16"/>
+          <p:cNvSpPr txBox="1"/>
+          <p:nvPr/>
+        </p:nvSpPr>
+        <p:spPr>
+          <a:xfrm>
+            <a:off x="777240" y="5541263"/>
+            <a:ext cx="365760" cy="274320"/>
+          </a:xfrm>
+          <a:prstGeom prst="rect">
+            <a:avLst/>
+          </a:prstGeom>
+          <a:noFill/>
+        </p:spPr>
+        <p:txBody>
+          <a:bodyPr wrap="square" anchor="t" lIns="0" rIns="0" tIns="0" bIns="0">
+            <a:spAutoFit/>
+          </a:bodyPr>
+          <a:lstStyle/>
+          <a:p>
+            <a:pPr algn="l">
+              <a:lnSpc>
+                <a:spcPct val="125000"/>
+              </a:lnSpc>
+            </a:pPr>
+            <a:r>
+              <a:rPr sz="1500" b="1">
+                <a:solidFill>
+                  <a:srgbClr val="C8A24B"/>
+                </a:solidFill>
+                <a:latin typeface="Malgun Gothic"/>
+                <a:ea typeface="Malgun Gothic"/>
+                <a:cs typeface="Malgun Gothic"/>
+              </a:rPr>
+              <a:t>6</a:t>
+            </a:r>
+          </a:p>
+        </p:txBody>
+      </p:sp>
+      <p:sp>
+        <p:nvSpPr>
+          <p:cNvPr id="18" name="TextBox 17"/>
+          <p:cNvSpPr txBox="1"/>
+          <p:nvPr/>
+        </p:nvSpPr>
+        <p:spPr>
+          <a:xfrm>
+            <a:off x="1161288" y="5541263"/>
+            <a:ext cx="10253167" cy="566928"/>
+          </a:xfrm>
+          <a:prstGeom prst="rect">
+            <a:avLst/>
+          </a:prstGeom>
+          <a:noFill/>
+        </p:spPr>
+        <p:txBody>
+          <a:bodyPr wrap="square" anchor="t" lIns="0" rIns="0" tIns="0" bIns="0">
+            <a:spAutoFit/>
+          </a:bodyPr>
+          <a:lstStyle/>
+          <a:p>
+            <a:pPr algn="l">
+              <a:lnSpc>
+                <a:spcPct val="130000"/>
+              </a:lnSpc>
+            </a:pPr>
+            <a:r>
+              <a:rPr sz="1350" b="0">
+                <a:solidFill>
+                  <a:srgbClr val="44505E"/>
+                </a:solidFill>
+                <a:latin typeface="Malgun Gothic"/>
+                <a:ea typeface="Malgun Gothic"/>
+                <a:cs typeface="Malgun Gothic"/>
+              </a:rPr>
+              <a:t>규제 정합 설계 — 위험자산 비중을 상시 70% 이하로 스스로 제한한다. IRP 계좌의 위험자산 70% 한도와 같은 선을 상품 내부에 둬, 가입자가 계좌를 이 상품 하나로 채워도 한도를 넘지 않는다.</a:t>
+            </a:r>
+          </a:p>
+        </p:txBody>
+      </p:sp>
+    </p:spTree>
+  </p:cSld>
+  <p:clrMapOvr>
+    <a:masterClrMapping/>
+  </p:clrMapOvr>
+</p:sld>
+</file>
+
+<file path=ppt/slides/slide18.xml><?xml version="1.0" encoding="utf-8"?>
+<p:sld xmlns:a="http://schemas.openxmlformats.org/drawingml/2006/main" xmlns:p="http://schemas.openxmlformats.org/presentationml/2006/main" xmlns:r="http://schemas.openxmlformats.org/officeDocument/2006/relationships">
+  <p:cSld>
+    <p:spTree>
+      <p:nvGrpSpPr>
+        <p:cNvPr id="1" name=""/>
+        <p:cNvGrpSpPr/>
+        <p:nvPr/>
+      </p:nvGrpSpPr>
+      <p:grpSpPr/>
+      <p:sp>
+        <p:nvSpPr>
+          <p:cNvPr id="2" name="Rectangle 1"/>
+          <p:cNvSpPr/>
+          <p:nvPr/>
+        </p:nvSpPr>
+        <p:spPr>
+          <a:xfrm>
+            <a:off x="0" y="0"/>
+            <a:ext cx="12191695" cy="6858000"/>
+          </a:xfrm>
+          <a:prstGeom prst="rect">
+            <a:avLst/>
+          </a:prstGeom>
+          <a:solidFill>
+            <a:srgbClr val="FFFFFF"/>
+          </a:solidFill>
+          <a:ln>
+            <a:noFill/>
+          </a:ln>
+          <a:effectLst/>
+        </p:spPr>
+        <p:style>
+          <a:lnRef idx="1">
+            <a:schemeClr val="accent1"/>
+          </a:lnRef>
+          <a:fillRef idx="3">
+            <a:schemeClr val="accent1"/>
+          </a:fillRef>
+          <a:effectRef idx="2">
+            <a:schemeClr val="accent1"/>
+          </a:effectRef>
+          <a:fontRef idx="minor">
+            <a:schemeClr val="lt1"/>
+          </a:fontRef>
+        </p:style>
+        <p:txBody>
+          <a:bodyPr rtlCol="0" anchor="ctr"/>
+          <a:lstStyle/>
+          <a:p/>
+        </p:txBody>
+      </p:sp>
+      <p:sp>
+        <p:nvSpPr>
+          <p:cNvPr id="3" name="TextBox 2"/>
+          <p:cNvSpPr txBox="1"/>
+          <p:nvPr/>
+        </p:nvSpPr>
+        <p:spPr>
+          <a:xfrm>
+            <a:off x="777240" y="475488"/>
+            <a:ext cx="10637215" cy="256032"/>
+          </a:xfrm>
+          <a:prstGeom prst="rect">
+            <a:avLst/>
+          </a:prstGeom>
+          <a:noFill/>
+        </p:spPr>
+        <p:txBody>
+          <a:bodyPr wrap="square" anchor="t" lIns="0" rIns="0" tIns="0" bIns="0">
+            <a:spAutoFit/>
+          </a:bodyPr>
+          <a:lstStyle/>
+          <a:p>
+            <a:pPr algn="l">
+              <a:lnSpc>
+                <a:spcPct val="125000"/>
+              </a:lnSpc>
+            </a:pPr>
+            <a:r>
+              <a:rPr sz="1200" b="1">
+                <a:solidFill>
+                  <a:srgbClr val="C8A24B"/>
+                </a:solidFill>
+                <a:latin typeface="Malgun Gothic"/>
+                <a:ea typeface="Malgun Gothic"/>
+                <a:cs typeface="Malgun Gothic"/>
+              </a:rPr>
+              <a:t>PRODUCT SUMMARY</a:t>
+            </a:r>
+          </a:p>
+        </p:txBody>
+      </p:sp>
+      <p:sp>
+        <p:nvSpPr>
+          <p:cNvPr id="4" name="TextBox 3"/>
+          <p:cNvSpPr txBox="1"/>
+          <p:nvPr/>
+        </p:nvSpPr>
+        <p:spPr>
+          <a:xfrm>
+            <a:off x="777240" y="786384"/>
+            <a:ext cx="10637215" cy="548640"/>
+          </a:xfrm>
+          <a:prstGeom prst="rect">
+            <a:avLst/>
+          </a:prstGeom>
+          <a:noFill/>
+        </p:spPr>
+        <p:txBody>
+          <a:bodyPr wrap="square" anchor="t" lIns="0" rIns="0" tIns="0" bIns="0">
+            <a:spAutoFit/>
+          </a:bodyPr>
+          <a:lstStyle/>
+          <a:p>
+            <a:pPr algn="l">
+              <a:lnSpc>
+                <a:spcPct val="125000"/>
+              </a:lnSpc>
+            </a:pPr>
+            <a:r>
+              <a:rPr sz="2700" b="1">
+                <a:solidFill>
+                  <a:srgbClr val="1F3A5F"/>
+                </a:solidFill>
+                <a:latin typeface="Malgun Gothic"/>
+                <a:ea typeface="Malgun Gothic"/>
+                <a:cs typeface="Malgun Gothic"/>
+              </a:rPr>
+              <a:t>상품 개요</a:t>
+            </a:r>
+          </a:p>
+        </p:txBody>
+      </p:sp>
+      <p:sp>
+        <p:nvSpPr>
+          <p:cNvPr id="5" name="Rectangle 4"/>
+          <p:cNvSpPr/>
+          <p:nvPr/>
+        </p:nvSpPr>
+        <p:spPr>
+          <a:xfrm>
+            <a:off x="777240" y="1444752"/>
+            <a:ext cx="10637215" cy="9525"/>
+          </a:xfrm>
+          <a:prstGeom prst="rect">
+            <a:avLst/>
+          </a:prstGeom>
+          <a:solidFill>
+            <a:srgbClr val="D8DEE6"/>
+          </a:solidFill>
+          <a:ln>
+            <a:noFill/>
+          </a:ln>
+          <a:effectLst/>
+        </p:spPr>
+        <p:style>
+          <a:lnRef idx="1">
+            <a:schemeClr val="accent1"/>
+          </a:lnRef>
+          <a:fillRef idx="3">
+            <a:schemeClr val="accent1"/>
+          </a:fillRef>
+          <a:effectRef idx="2">
+            <a:schemeClr val="accent1"/>
+          </a:effectRef>
+          <a:fontRef idx="minor">
+            <a:schemeClr val="lt1"/>
+          </a:fontRef>
+        </p:style>
+        <p:txBody>
+          <a:bodyPr rtlCol="0" anchor="ctr"/>
+          <a:lstStyle/>
+          <a:p/>
+        </p:txBody>
+      </p:sp>
       <p:graphicFrame>
         <p:nvGraphicFramePr>
           <p:cNvPr id="6" name="Table 5"/>
@@ -10818,7 +11709,7 @@
         </p:nvGraphicFramePr>
         <p:xfrm>
           <a:off x="777240" y="1682496"/>
-          <a:ext cx="10637214" cy="3218688"/>
+          <a:ext cx="10637214" cy="3364992"/>
         </p:xfrm>
         <a:graphic>
           <a:graphicData uri="http://schemas.openxmlformats.org/drawingml/2006/table">
@@ -10830,7 +11721,7 @@
                 <a:gridCol w="2226393"/>
                 <a:gridCol w="8410821"/>
               </a:tblGrid>
-              <a:tr h="402336">
+              <a:tr h="420624">
                 <a:tc>
                   <a:txBody>
                     <a:bodyPr/>
@@ -10882,7 +11773,7 @@
                   </a:tcPr>
                 </a:tc>
               </a:tr>
-              <a:tr h="402336">
+              <a:tr h="420624">
                 <a:tc>
                   <a:txBody>
                     <a:bodyPr/>
@@ -10934,7 +11825,7 @@
                   </a:tcPr>
                 </a:tc>
               </a:tr>
-              <a:tr h="402336">
+              <a:tr h="420624">
                 <a:tc>
                   <a:txBody>
                     <a:bodyPr/>
@@ -10986,7 +11877,7 @@
                   </a:tcPr>
                 </a:tc>
               </a:tr>
-              <a:tr h="402336">
+              <a:tr h="420624">
                 <a:tc>
                   <a:txBody>
                     <a:bodyPr/>
@@ -11038,7 +11929,7 @@
                   </a:tcPr>
                 </a:tc>
               </a:tr>
-              <a:tr h="402336">
+              <a:tr h="420624">
                 <a:tc>
                   <a:txBody>
                     <a:bodyPr/>
@@ -11090,7 +11981,7 @@
                   </a:tcPr>
                 </a:tc>
               </a:tr>
-              <a:tr h="402336">
+              <a:tr h="420624">
                 <a:tc>
                   <a:txBody>
                     <a:bodyPr/>
@@ -11142,7 +12033,7 @@
                   </a:tcPr>
                 </a:tc>
               </a:tr>
-              <a:tr h="402336">
+              <a:tr h="420624">
                 <a:tc>
                   <a:txBody>
                     <a:bodyPr/>
@@ -11194,7 +12085,7 @@
                   </a:tcPr>
                 </a:tc>
               </a:tr>
-              <a:tr h="402336">
+              <a:tr h="420624">
                 <a:tc>
                   <a:txBody>
                     <a:bodyPr/>
@@ -11250,293 +12141,6 @@
           </a:graphicData>
         </a:graphic>
       </p:graphicFrame>
-      <p:sp>
-        <p:nvSpPr>
-          <p:cNvPr id="7" name="TextBox 6"/>
-          <p:cNvSpPr txBox="1"/>
-          <p:nvPr/>
-        </p:nvSpPr>
-        <p:spPr>
-          <a:xfrm>
-            <a:off x="777240" y="5431535"/>
-            <a:ext cx="10637215" cy="320040"/>
-          </a:xfrm>
-          <a:prstGeom prst="rect">
-            <a:avLst/>
-          </a:prstGeom>
-          <a:noFill/>
-        </p:spPr>
-        <p:txBody>
-          <a:bodyPr wrap="square" anchor="t" lIns="0" rIns="0" tIns="0" bIns="0">
-            <a:spAutoFit/>
-          </a:bodyPr>
-          <a:lstStyle/>
-          <a:p>
-            <a:pPr algn="l">
-              <a:lnSpc>
-                <a:spcPct val="125000"/>
-              </a:lnSpc>
-            </a:pPr>
-            <a:r>
-              <a:rPr sz="1500" b="1">
-                <a:solidFill>
-                  <a:srgbClr val="1F3A5F"/>
-                </a:solidFill>
-                <a:latin typeface="Malgun Gothic"/>
-                <a:ea typeface="Malgun Gothic"/>
-                <a:cs typeface="Malgun Gothic"/>
-              </a:rPr>
-              <a:t>팀 역할 분담 (R&amp;R)</a:t>
-            </a:r>
-          </a:p>
-        </p:txBody>
-      </p:sp>
-      <p:sp>
-        <p:nvSpPr>
-          <p:cNvPr id="8" name="TextBox 7"/>
-          <p:cNvSpPr txBox="1"/>
-          <p:nvPr/>
-        </p:nvSpPr>
-        <p:spPr>
-          <a:xfrm>
-            <a:off x="777240" y="5843015"/>
-            <a:ext cx="3411626" cy="237744"/>
-          </a:xfrm>
-          <a:prstGeom prst="rect">
-            <a:avLst/>
-          </a:prstGeom>
-          <a:noFill/>
-        </p:spPr>
-        <p:txBody>
-          <a:bodyPr wrap="square" anchor="t" lIns="0" rIns="0" tIns="0" bIns="0">
-            <a:spAutoFit/>
-          </a:bodyPr>
-          <a:lstStyle/>
-          <a:p>
-            <a:pPr algn="l">
-              <a:lnSpc>
-                <a:spcPct val="125000"/>
-              </a:lnSpc>
-            </a:pPr>
-            <a:r>
-              <a:rPr sz="1300" b="1">
-                <a:solidFill>
-                  <a:srgbClr val="C8A24B"/>
-                </a:solidFill>
-                <a:latin typeface="Malgun Gothic"/>
-                <a:ea typeface="Malgun Gothic"/>
-                <a:cs typeface="Malgun Gothic"/>
-              </a:rPr>
-              <a:t>CIO</a:t>
-            </a:r>
-          </a:p>
-        </p:txBody>
-      </p:sp>
-      <p:sp>
-        <p:nvSpPr>
-          <p:cNvPr id="9" name="TextBox 8"/>
-          <p:cNvSpPr txBox="1"/>
-          <p:nvPr/>
-        </p:nvSpPr>
-        <p:spPr>
-          <a:xfrm>
-            <a:off x="777240" y="6108191"/>
-            <a:ext cx="3411626" cy="640080"/>
-          </a:xfrm>
-          <a:prstGeom prst="rect">
-            <a:avLst/>
-          </a:prstGeom>
-          <a:noFill/>
-        </p:spPr>
-        <p:txBody>
-          <a:bodyPr wrap="square" anchor="t" lIns="0" rIns="0" tIns="0" bIns="0">
-            <a:spAutoFit/>
-          </a:bodyPr>
-          <a:lstStyle/>
-          <a:p>
-            <a:pPr algn="l">
-              <a:lnSpc>
-                <a:spcPct val="125000"/>
-              </a:lnSpc>
-            </a:pPr>
-            <a:r>
-              <a:rPr sz="1150" b="0">
-                <a:solidFill>
-                  <a:srgbClr val="44505E"/>
-                </a:solidFill>
-                <a:latin typeface="Malgun Gothic"/>
-                <a:ea typeface="Malgun Gothic"/>
-                <a:cs typeface="Malgun Gothic"/>
-              </a:rPr>
-              <a:t>상품컨셉·비교지수 선정 · 국면지표·자산배분 설계 · 리스크 규칙</a:t>
-            </a:r>
-          </a:p>
-        </p:txBody>
-      </p:sp>
-      <p:sp>
-        <p:nvSpPr>
-          <p:cNvPr id="10" name="TextBox 9"/>
-          <p:cNvSpPr txBox="1"/>
-          <p:nvPr/>
-        </p:nvSpPr>
-        <p:spPr>
-          <a:xfrm>
-            <a:off x="4390034" y="5843015"/>
-            <a:ext cx="3411626" cy="237744"/>
-          </a:xfrm>
-          <a:prstGeom prst="rect">
-            <a:avLst/>
-          </a:prstGeom>
-          <a:noFill/>
-        </p:spPr>
-        <p:txBody>
-          <a:bodyPr wrap="square" anchor="t" lIns="0" rIns="0" tIns="0" bIns="0">
-            <a:spAutoFit/>
-          </a:bodyPr>
-          <a:lstStyle/>
-          <a:p>
-            <a:pPr algn="l">
-              <a:lnSpc>
-                <a:spcPct val="125000"/>
-              </a:lnSpc>
-            </a:pPr>
-            <a:r>
-              <a:rPr sz="1300" b="1">
-                <a:solidFill>
-                  <a:srgbClr val="C8A24B"/>
-                </a:solidFill>
-                <a:latin typeface="Malgun Gothic"/>
-                <a:ea typeface="Malgun Gothic"/>
-                <a:cs typeface="Malgun Gothic"/>
-              </a:rPr>
-              <a:t>CTO</a:t>
-            </a:r>
-          </a:p>
-        </p:txBody>
-      </p:sp>
-      <p:sp>
-        <p:nvSpPr>
-          <p:cNvPr id="11" name="TextBox 10"/>
-          <p:cNvSpPr txBox="1"/>
-          <p:nvPr/>
-        </p:nvSpPr>
-        <p:spPr>
-          <a:xfrm>
-            <a:off x="4390034" y="6108191"/>
-            <a:ext cx="3411626" cy="640080"/>
-          </a:xfrm>
-          <a:prstGeom prst="rect">
-            <a:avLst/>
-          </a:prstGeom>
-          <a:noFill/>
-        </p:spPr>
-        <p:txBody>
-          <a:bodyPr wrap="square" anchor="t" lIns="0" rIns="0" tIns="0" bIns="0">
-            <a:spAutoFit/>
-          </a:bodyPr>
-          <a:lstStyle/>
-          <a:p>
-            <a:pPr algn="l">
-              <a:lnSpc>
-                <a:spcPct val="125000"/>
-              </a:lnSpc>
-            </a:pPr>
-            <a:r>
-              <a:rPr sz="1150" b="0">
-                <a:solidFill>
-                  <a:srgbClr val="44505E"/>
-                </a:solidFill>
-                <a:latin typeface="Malgun Gothic"/>
-                <a:ea typeface="Malgun Gothic"/>
-                <a:cs typeface="Malgun Gothic"/>
-              </a:rPr>
-              <a:t>데이터 수집·전처리 · 파이썬 백테스트 구현 · 지표 코드화</a:t>
-            </a:r>
-          </a:p>
-        </p:txBody>
-      </p:sp>
-      <p:sp>
-        <p:nvSpPr>
-          <p:cNvPr id="12" name="TextBox 11"/>
-          <p:cNvSpPr txBox="1"/>
-          <p:nvPr/>
-        </p:nvSpPr>
-        <p:spPr>
-          <a:xfrm>
-            <a:off x="8002828" y="5843015"/>
-            <a:ext cx="3411626" cy="237744"/>
-          </a:xfrm>
-          <a:prstGeom prst="rect">
-            <a:avLst/>
-          </a:prstGeom>
-          <a:noFill/>
-        </p:spPr>
-        <p:txBody>
-          <a:bodyPr wrap="square" anchor="t" lIns="0" rIns="0" tIns="0" bIns="0">
-            <a:spAutoFit/>
-          </a:bodyPr>
-          <a:lstStyle/>
-          <a:p>
-            <a:pPr algn="l">
-              <a:lnSpc>
-                <a:spcPct val="125000"/>
-              </a:lnSpc>
-            </a:pPr>
-            <a:r>
-              <a:rPr sz="1300" b="1">
-                <a:solidFill>
-                  <a:srgbClr val="C8A24B"/>
-                </a:solidFill>
-                <a:latin typeface="Malgun Gothic"/>
-                <a:ea typeface="Malgun Gothic"/>
-                <a:cs typeface="Malgun Gothic"/>
-              </a:rPr>
-              <a:t>CMO</a:t>
-            </a:r>
-          </a:p>
-        </p:txBody>
-      </p:sp>
-      <p:sp>
-        <p:nvSpPr>
-          <p:cNvPr id="13" name="TextBox 12"/>
-          <p:cNvSpPr txBox="1"/>
-          <p:nvPr/>
-        </p:nvSpPr>
-        <p:spPr>
-          <a:xfrm>
-            <a:off x="8002828" y="6108191"/>
-            <a:ext cx="3411626" cy="640080"/>
-          </a:xfrm>
-          <a:prstGeom prst="rect">
-            <a:avLst/>
-          </a:prstGeom>
-          <a:noFill/>
-        </p:spPr>
-        <p:txBody>
-          <a:bodyPr wrap="square" anchor="t" lIns="0" rIns="0" tIns="0" bIns="0">
-            <a:spAutoFit/>
-          </a:bodyPr>
-          <a:lstStyle/>
-          <a:p>
-            <a:pPr algn="l">
-              <a:lnSpc>
-                <a:spcPct val="125000"/>
-              </a:lnSpc>
-            </a:pPr>
-            <a:r>
-              <a:rPr sz="1150" b="0">
-                <a:solidFill>
-                  <a:srgbClr val="44505E"/>
-                </a:solidFill>
-                <a:latin typeface="Malgun Gothic"/>
-                <a:ea typeface="Malgun Gothic"/>
-                <a:cs typeface="Malgun Gothic"/>
-              </a:rPr>
-              <a:t>타겟 고객·네이밍 · 투자제안서 제작 · 성과 스토리텔링·발표</a:t>
-            </a:r>
-          </a:p>
-        </p:txBody>
-      </p:sp>
     </p:spTree>
   </p:cSld>
   <p:clrMapOvr>
@@ -11545,7 +12149,7 @@
 </p:sld>
 </file>
 
-<file path=ppt/slides/slide18.xml><?xml version="1.0" encoding="utf-8"?>
+<file path=ppt/slides/slide19.xml><?xml version="1.0" encoding="utf-8"?>
 <p:sld xmlns:a="http://schemas.openxmlformats.org/drawingml/2006/main" xmlns:p="http://schemas.openxmlformats.org/presentationml/2006/main" xmlns:r="http://schemas.openxmlformats.org/officeDocument/2006/relationships">
   <p:cSld>
     <p:spTree>
@@ -11570,6 +12174,255 @@
             <a:avLst/>
           </a:prstGeom>
           <a:solidFill>
+            <a:srgbClr val="FFFFFF"/>
+          </a:solidFill>
+          <a:ln>
+            <a:noFill/>
+          </a:ln>
+          <a:effectLst/>
+        </p:spPr>
+        <p:style>
+          <a:lnRef idx="1">
+            <a:schemeClr val="accent1"/>
+          </a:lnRef>
+          <a:fillRef idx="3">
+            <a:schemeClr val="accent1"/>
+          </a:fillRef>
+          <a:effectRef idx="2">
+            <a:schemeClr val="accent1"/>
+          </a:effectRef>
+          <a:fontRef idx="minor">
+            <a:schemeClr val="lt1"/>
+          </a:fontRef>
+        </p:style>
+        <p:txBody>
+          <a:bodyPr rtlCol="0" anchor="ctr"/>
+          <a:lstStyle/>
+          <a:p/>
+        </p:txBody>
+      </p:sp>
+      <p:sp>
+        <p:nvSpPr>
+          <p:cNvPr id="3" name="TextBox 2"/>
+          <p:cNvSpPr txBox="1"/>
+          <p:nvPr/>
+        </p:nvSpPr>
+        <p:spPr>
+          <a:xfrm>
+            <a:off x="777240" y="475488"/>
+            <a:ext cx="10637215" cy="256032"/>
+          </a:xfrm>
+          <a:prstGeom prst="rect">
+            <a:avLst/>
+          </a:prstGeom>
+          <a:noFill/>
+        </p:spPr>
+        <p:txBody>
+          <a:bodyPr wrap="square" anchor="t" lIns="0" rIns="0" tIns="0" bIns="0">
+            <a:spAutoFit/>
+          </a:bodyPr>
+          <a:lstStyle/>
+          <a:p>
+            <a:pPr algn="l">
+              <a:lnSpc>
+                <a:spcPct val="125000"/>
+              </a:lnSpc>
+            </a:pPr>
+            <a:r>
+              <a:rPr sz="1200" b="1">
+                <a:solidFill>
+                  <a:srgbClr val="C8A24B"/>
+                </a:solidFill>
+                <a:latin typeface="Malgun Gothic"/>
+                <a:ea typeface="Malgun Gothic"/>
+                <a:cs typeface="Malgun Gothic"/>
+              </a:rPr>
+              <a:t>TEAM · R&amp;R</a:t>
+            </a:r>
+          </a:p>
+        </p:txBody>
+      </p:sp>
+      <p:sp>
+        <p:nvSpPr>
+          <p:cNvPr id="4" name="TextBox 3"/>
+          <p:cNvSpPr txBox="1"/>
+          <p:nvPr/>
+        </p:nvSpPr>
+        <p:spPr>
+          <a:xfrm>
+            <a:off x="777240" y="786384"/>
+            <a:ext cx="10637215" cy="548640"/>
+          </a:xfrm>
+          <a:prstGeom prst="rect">
+            <a:avLst/>
+          </a:prstGeom>
+          <a:noFill/>
+        </p:spPr>
+        <p:txBody>
+          <a:bodyPr wrap="square" anchor="t" lIns="0" rIns="0" tIns="0" bIns="0">
+            <a:spAutoFit/>
+          </a:bodyPr>
+          <a:lstStyle/>
+          <a:p>
+            <a:pPr algn="l">
+              <a:lnSpc>
+                <a:spcPct val="125000"/>
+              </a:lnSpc>
+            </a:pPr>
+            <a:r>
+              <a:rPr sz="2700" b="1">
+                <a:solidFill>
+                  <a:srgbClr val="1F3A5F"/>
+                </a:solidFill>
+                <a:latin typeface="Malgun Gothic"/>
+                <a:ea typeface="Malgun Gothic"/>
+                <a:cs typeface="Malgun Gothic"/>
+              </a:rPr>
+              <a:t>팀 역할 분담 — 세 역할이 한 상품을 만든다</a:t>
+            </a:r>
+          </a:p>
+        </p:txBody>
+      </p:sp>
+      <p:sp>
+        <p:nvSpPr>
+          <p:cNvPr id="5" name="Rectangle 4"/>
+          <p:cNvSpPr/>
+          <p:nvPr/>
+        </p:nvSpPr>
+        <p:spPr>
+          <a:xfrm>
+            <a:off x="777240" y="1444752"/>
+            <a:ext cx="10637215" cy="9525"/>
+          </a:xfrm>
+          <a:prstGeom prst="rect">
+            <a:avLst/>
+          </a:prstGeom>
+          <a:solidFill>
+            <a:srgbClr val="D8DEE6"/>
+          </a:solidFill>
+          <a:ln>
+            <a:noFill/>
+          </a:ln>
+          <a:effectLst/>
+        </p:spPr>
+        <p:style>
+          <a:lnRef idx="1">
+            <a:schemeClr val="accent1"/>
+          </a:lnRef>
+          <a:fillRef idx="3">
+            <a:schemeClr val="accent1"/>
+          </a:fillRef>
+          <a:effectRef idx="2">
+            <a:schemeClr val="accent1"/>
+          </a:effectRef>
+          <a:fontRef idx="minor">
+            <a:schemeClr val="lt1"/>
+          </a:fontRef>
+        </p:style>
+        <p:txBody>
+          <a:bodyPr rtlCol="0" anchor="ctr"/>
+          <a:lstStyle/>
+          <a:p/>
+        </p:txBody>
+      </p:sp>
+      <p:sp>
+        <p:nvSpPr>
+          <p:cNvPr id="6" name="TextBox 5"/>
+          <p:cNvSpPr txBox="1"/>
+          <p:nvPr/>
+        </p:nvSpPr>
+        <p:spPr>
+          <a:xfrm>
+            <a:off x="777240" y="1682496"/>
+            <a:ext cx="10637215" cy="310896"/>
+          </a:xfrm>
+          <a:prstGeom prst="rect">
+            <a:avLst/>
+          </a:prstGeom>
+          <a:noFill/>
+        </p:spPr>
+        <p:txBody>
+          <a:bodyPr wrap="square" anchor="t" lIns="0" rIns="0" tIns="0" bIns="0">
+            <a:spAutoFit/>
+          </a:bodyPr>
+          <a:lstStyle/>
+          <a:p>
+            <a:pPr algn="l">
+              <a:lnSpc>
+                <a:spcPct val="125000"/>
+              </a:lnSpc>
+            </a:pPr>
+            <a:r>
+              <a:rPr sz="1500" b="0">
+                <a:solidFill>
+                  <a:srgbClr val="44505E"/>
+                </a:solidFill>
+                <a:latin typeface="Malgun Gothic"/>
+                <a:ea typeface="Malgun Gothic"/>
+                <a:cs typeface="Malgun Gothic"/>
+              </a:rPr>
+              <a:t>ETF 운용본부의 역할 구조를 그대로 나눴고, 각자의 산출물로 결과를 확인할 수 있게 했다.</a:t>
+            </a:r>
+          </a:p>
+        </p:txBody>
+      </p:sp>
+      <p:sp>
+        <p:nvSpPr>
+          <p:cNvPr id="7" name="Rectangle 6"/>
+          <p:cNvSpPr/>
+          <p:nvPr/>
+        </p:nvSpPr>
+        <p:spPr>
+          <a:xfrm>
+            <a:off x="777240" y="2231136"/>
+            <a:ext cx="3411626" cy="3602736"/>
+          </a:xfrm>
+          <a:prstGeom prst="rect">
+            <a:avLst/>
+          </a:prstGeom>
+          <a:solidFill>
+            <a:srgbClr val="F5F7FA"/>
+          </a:solidFill>
+          <a:ln>
+            <a:noFill/>
+          </a:ln>
+          <a:effectLst/>
+        </p:spPr>
+        <p:style>
+          <a:lnRef idx="1">
+            <a:schemeClr val="accent1"/>
+          </a:lnRef>
+          <a:fillRef idx="3">
+            <a:schemeClr val="accent1"/>
+          </a:fillRef>
+          <a:effectRef idx="2">
+            <a:schemeClr val="accent1"/>
+          </a:effectRef>
+          <a:fontRef idx="minor">
+            <a:schemeClr val="lt1"/>
+          </a:fontRef>
+        </p:style>
+        <p:txBody>
+          <a:bodyPr rtlCol="0" anchor="ctr"/>
+          <a:lstStyle/>
+          <a:p/>
+        </p:txBody>
+      </p:sp>
+      <p:sp>
+        <p:nvSpPr>
+          <p:cNvPr id="8" name="Rectangle 7"/>
+          <p:cNvSpPr/>
+          <p:nvPr/>
+        </p:nvSpPr>
+        <p:spPr>
+          <a:xfrm>
+            <a:off x="777240" y="2231136"/>
+            <a:ext cx="3411626" cy="658368"/>
+          </a:xfrm>
+          <a:prstGeom prst="rect">
+            <a:avLst/>
+          </a:prstGeom>
+          <a:solidFill>
             <a:srgbClr val="1F3A5F"/>
           </a:solidFill>
           <a:ln>
@@ -11599,14 +12452,96 @@
       </p:sp>
       <p:sp>
         <p:nvSpPr>
-          <p:cNvPr id="3" name="Rectangle 2"/>
+          <p:cNvPr id="9" name="TextBox 8"/>
+          <p:cNvSpPr txBox="1"/>
+          <p:nvPr/>
+        </p:nvSpPr>
+        <p:spPr>
+          <a:xfrm>
+            <a:off x="996696" y="2322576"/>
+            <a:ext cx="2972714" cy="292608"/>
+          </a:xfrm>
+          <a:prstGeom prst="rect">
+            <a:avLst/>
+          </a:prstGeom>
+          <a:noFill/>
+        </p:spPr>
+        <p:txBody>
+          <a:bodyPr wrap="square" anchor="t" lIns="0" rIns="0" tIns="0" bIns="0">
+            <a:spAutoFit/>
+          </a:bodyPr>
+          <a:lstStyle/>
+          <a:p>
+            <a:pPr algn="l">
+              <a:lnSpc>
+                <a:spcPct val="125000"/>
+              </a:lnSpc>
+            </a:pPr>
+            <a:r>
+              <a:rPr sz="1900" b="1">
+                <a:solidFill>
+                  <a:srgbClr val="FFFFFF"/>
+                </a:solidFill>
+                <a:latin typeface="Malgun Gothic"/>
+                <a:ea typeface="Malgun Gothic"/>
+                <a:cs typeface="Malgun Gothic"/>
+              </a:rPr>
+              <a:t>CIO</a:t>
+            </a:r>
+          </a:p>
+        </p:txBody>
+      </p:sp>
+      <p:sp>
+        <p:nvSpPr>
+          <p:cNvPr id="10" name="TextBox 9"/>
+          <p:cNvSpPr txBox="1"/>
+          <p:nvPr/>
+        </p:nvSpPr>
+        <p:spPr>
+          <a:xfrm>
+            <a:off x="996696" y="2633472"/>
+            <a:ext cx="2972714" cy="219456"/>
+          </a:xfrm>
+          <a:prstGeom prst="rect">
+            <a:avLst/>
+          </a:prstGeom>
+          <a:noFill/>
+        </p:spPr>
+        <p:txBody>
+          <a:bodyPr wrap="square" anchor="t" lIns="0" rIns="0" tIns="0" bIns="0">
+            <a:spAutoFit/>
+          </a:bodyPr>
+          <a:lstStyle/>
+          <a:p>
+            <a:pPr algn="l">
+              <a:lnSpc>
+                <a:spcPct val="125000"/>
+              </a:lnSpc>
+            </a:pPr>
+            <a:r>
+              <a:rPr sz="1050" b="0">
+                <a:solidFill>
+                  <a:srgbClr val="C8A24B"/>
+                </a:solidFill>
+                <a:latin typeface="Malgun Gothic"/>
+                <a:ea typeface="Malgun Gothic"/>
+                <a:cs typeface="Malgun Gothic"/>
+              </a:rPr>
+              <a:t>최고투자책임자 · 전략 · 검증</a:t>
+            </a:r>
+          </a:p>
+        </p:txBody>
+      </p:sp>
+      <p:sp>
+        <p:nvSpPr>
+          <p:cNvPr id="11" name="Rectangle 10"/>
           <p:cNvSpPr/>
           <p:nvPr/>
         </p:nvSpPr>
         <p:spPr>
           <a:xfrm>
-            <a:off x="0" y="6739128"/>
-            <a:ext cx="12191695" cy="118872"/>
+            <a:off x="996696" y="3136392"/>
+            <a:ext cx="54864" cy="54864"/>
           </a:xfrm>
           <a:prstGeom prst="rect">
             <a:avLst/>
@@ -11641,14 +12576,14 @@
       </p:sp>
       <p:sp>
         <p:nvSpPr>
-          <p:cNvPr id="4" name="TextBox 3"/>
+          <p:cNvPr id="12" name="TextBox 11"/>
           <p:cNvSpPr txBox="1"/>
           <p:nvPr/>
         </p:nvSpPr>
         <p:spPr>
           <a:xfrm>
-            <a:off x="777240" y="2148840"/>
-            <a:ext cx="10637215" cy="822960"/>
+            <a:off x="1143000" y="3072384"/>
+            <a:ext cx="2808122" cy="502920"/>
           </a:xfrm>
           <a:prstGeom prst="rect">
             <a:avLst/>
@@ -11663,33 +12598,33 @@
           <a:p>
             <a:pPr algn="l">
               <a:lnSpc>
-                <a:spcPct val="125000"/>
+                <a:spcPct val="130000"/>
               </a:lnSpc>
             </a:pPr>
             <a:r>
-              <a:rPr sz="4200" b="1">
-                <a:solidFill>
-                  <a:srgbClr val="FFFFFF"/>
+              <a:rPr sz="1100" b="0">
+                <a:solidFill>
+                  <a:srgbClr val="44505E"/>
                 </a:solidFill>
                 <a:latin typeface="Malgun Gothic"/>
                 <a:ea typeface="Malgun Gothic"/>
                 <a:cs typeface="Malgun Gothic"/>
               </a:rPr>
-              <a:t>확신의 크기만큼만 싣는다</a:t>
-            </a:r>
-          </a:p>
-        </p:txBody>
-      </p:sp>
-      <p:sp>
-        <p:nvSpPr>
-          <p:cNvPr id="5" name="Rectangle 4"/>
+              <a:t>상품 컨셉과 비교지수 선정(KODEX TRF7030)</a:t>
+            </a:r>
+          </a:p>
+        </p:txBody>
+      </p:sp>
+      <p:sp>
+        <p:nvSpPr>
+          <p:cNvPr id="13" name="Rectangle 12"/>
           <p:cNvSpPr/>
           <p:nvPr/>
         </p:nvSpPr>
         <p:spPr>
           <a:xfrm>
-            <a:off x="777240" y="3200400"/>
-            <a:ext cx="2377440" cy="9525"/>
+            <a:off x="996696" y="3666744"/>
+            <a:ext cx="54864" cy="54864"/>
           </a:xfrm>
           <a:prstGeom prst="rect">
             <a:avLst/>
@@ -11724,14 +12659,14 @@
       </p:sp>
       <p:sp>
         <p:nvSpPr>
-          <p:cNvPr id="6" name="TextBox 5"/>
+          <p:cNvPr id="14" name="TextBox 13"/>
           <p:cNvSpPr txBox="1"/>
           <p:nvPr/>
         </p:nvSpPr>
         <p:spPr>
           <a:xfrm>
-            <a:off x="777240" y="3520440"/>
-            <a:ext cx="9265615" cy="1280160"/>
+            <a:off x="1143000" y="3602736"/>
+            <a:ext cx="2808122" cy="502920"/>
           </a:xfrm>
           <a:prstGeom prst="rect">
             <a:avLst/>
@@ -11746,34 +12681,366 @@
           <a:p>
             <a:pPr algn="l">
               <a:lnSpc>
-                <a:spcPct val="145000"/>
+                <a:spcPct val="130000"/>
               </a:lnSpc>
             </a:pPr>
             <a:r>
-              <a:rPr sz="1700" b="0">
-                <a:solidFill>
-                  <a:srgbClr val="D3DCE8"/>
+              <a:rPr sz="1100" b="0">
+                <a:solidFill>
+                  <a:srgbClr val="44505E"/>
                 </a:solidFill>
                 <a:latin typeface="Malgun Gothic"/>
                 <a:ea typeface="Malgun Gothic"/>
                 <a:cs typeface="Malgun Gothic"/>
               </a:rPr>
-              <a:t>시장을 이기는 상품이 아니라, 시장에 남아 있게 하는 상품입니다.
-55세까지 묶이는 계좌에 필요한 것은 가장 높은 수익률이 아니라 견딜 수 있는 낙폭입니다.</a:t>
-            </a:r>
-          </a:p>
-        </p:txBody>
-      </p:sp>
-      <p:sp>
-        <p:nvSpPr>
-          <p:cNvPr id="7" name="TextBox 6"/>
+              <a:t>TrendScore 4팩터 설계 및 가중 결정</a:t>
+            </a:r>
+          </a:p>
+        </p:txBody>
+      </p:sp>
+      <p:sp>
+        <p:nvSpPr>
+          <p:cNvPr id="15" name="Rectangle 14"/>
+          <p:cNvSpPr/>
+          <p:nvPr/>
+        </p:nvSpPr>
+        <p:spPr>
+          <a:xfrm>
+            <a:off x="996696" y="4197096"/>
+            <a:ext cx="54864" cy="54864"/>
+          </a:xfrm>
+          <a:prstGeom prst="rect">
+            <a:avLst/>
+          </a:prstGeom>
+          <a:solidFill>
+            <a:srgbClr val="C8A24B"/>
+          </a:solidFill>
+          <a:ln>
+            <a:noFill/>
+          </a:ln>
+          <a:effectLst/>
+        </p:spPr>
+        <p:style>
+          <a:lnRef idx="1">
+            <a:schemeClr val="accent1"/>
+          </a:lnRef>
+          <a:fillRef idx="3">
+            <a:schemeClr val="accent1"/>
+          </a:fillRef>
+          <a:effectRef idx="2">
+            <a:schemeClr val="accent1"/>
+          </a:effectRef>
+          <a:fontRef idx="minor">
+            <a:schemeClr val="lt1"/>
+          </a:fontRef>
+        </p:style>
+        <p:txBody>
+          <a:bodyPr rtlCol="0" anchor="ctr"/>
+          <a:lstStyle/>
+          <a:p/>
+        </p:txBody>
+      </p:sp>
+      <p:sp>
+        <p:nvSpPr>
+          <p:cNvPr id="16" name="TextBox 15"/>
           <p:cNvSpPr txBox="1"/>
           <p:nvPr/>
         </p:nvSpPr>
         <p:spPr>
           <a:xfrm>
-            <a:off x="777240" y="5120640"/>
-            <a:ext cx="10637215" cy="365760"/>
+            <a:off x="1143000" y="4133088"/>
+            <a:ext cx="2808122" cy="502920"/>
+          </a:xfrm>
+          <a:prstGeom prst="rect">
+            <a:avLst/>
+          </a:prstGeom>
+          <a:noFill/>
+        </p:spPr>
+        <p:txBody>
+          <a:bodyPr wrap="square" anchor="t" lIns="0" rIns="0" tIns="0" bIns="0">
+            <a:spAutoFit/>
+          </a:bodyPr>
+          <a:lstStyle/>
+          <a:p>
+            <a:pPr algn="l">
+              <a:lnSpc>
+                <a:spcPct val="130000"/>
+              </a:lnSpc>
+            </a:pPr>
+            <a:r>
+              <a:rPr sz="1100" b="0">
+                <a:solidFill>
+                  <a:srgbClr val="44505E"/>
+                </a:solidFill>
+                <a:latin typeface="Malgun Gothic"/>
+                <a:ea typeface="Malgun Gothic"/>
+                <a:cs typeface="Malgun Gothic"/>
+              </a:rPr>
+              <a:t>자산배분 70:30 · 문턱 52/60/45 확정</a:t>
+            </a:r>
+          </a:p>
+        </p:txBody>
+      </p:sp>
+      <p:sp>
+        <p:nvSpPr>
+          <p:cNvPr id="17" name="Rectangle 16"/>
+          <p:cNvSpPr/>
+          <p:nvPr/>
+        </p:nvSpPr>
+        <p:spPr>
+          <a:xfrm>
+            <a:off x="996696" y="4727447"/>
+            <a:ext cx="54864" cy="54864"/>
+          </a:xfrm>
+          <a:prstGeom prst="rect">
+            <a:avLst/>
+          </a:prstGeom>
+          <a:solidFill>
+            <a:srgbClr val="C8A24B"/>
+          </a:solidFill>
+          <a:ln>
+            <a:noFill/>
+          </a:ln>
+          <a:effectLst/>
+        </p:spPr>
+        <p:style>
+          <a:lnRef idx="1">
+            <a:schemeClr val="accent1"/>
+          </a:lnRef>
+          <a:fillRef idx="3">
+            <a:schemeClr val="accent1"/>
+          </a:fillRef>
+          <a:effectRef idx="2">
+            <a:schemeClr val="accent1"/>
+          </a:effectRef>
+          <a:fontRef idx="minor">
+            <a:schemeClr val="lt1"/>
+          </a:fontRef>
+        </p:style>
+        <p:txBody>
+          <a:bodyPr rtlCol="0" anchor="ctr"/>
+          <a:lstStyle/>
+          <a:p/>
+        </p:txBody>
+      </p:sp>
+      <p:sp>
+        <p:nvSpPr>
+          <p:cNvPr id="18" name="TextBox 17"/>
+          <p:cNvSpPr txBox="1"/>
+          <p:nvPr/>
+        </p:nvSpPr>
+        <p:spPr>
+          <a:xfrm>
+            <a:off x="1143000" y="4663439"/>
+            <a:ext cx="2808122" cy="502920"/>
+          </a:xfrm>
+          <a:prstGeom prst="rect">
+            <a:avLst/>
+          </a:prstGeom>
+          <a:noFill/>
+        </p:spPr>
+        <p:txBody>
+          <a:bodyPr wrap="square" anchor="t" lIns="0" rIns="0" tIns="0" bIns="0">
+            <a:spAutoFit/>
+          </a:bodyPr>
+          <a:lstStyle/>
+          <a:p>
+            <a:pPr algn="l">
+              <a:lnSpc>
+                <a:spcPct val="130000"/>
+              </a:lnSpc>
+            </a:pPr>
+            <a:r>
+              <a:rPr sz="1100" b="0">
+                <a:solidFill>
+                  <a:srgbClr val="44505E"/>
+                </a:solidFill>
+                <a:latin typeface="Malgun Gothic"/>
+                <a:ea typeface="Malgun Gothic"/>
+                <a:cs typeface="Malgun Gothic"/>
+              </a:rPr>
+              <a:t>리스크 룰(손절·서킷브레이커·집중한도) 수립</a:t>
+            </a:r>
+          </a:p>
+        </p:txBody>
+      </p:sp>
+      <p:sp>
+        <p:nvSpPr>
+          <p:cNvPr id="19" name="Rectangle 18"/>
+          <p:cNvSpPr/>
+          <p:nvPr/>
+        </p:nvSpPr>
+        <p:spPr>
+          <a:xfrm>
+            <a:off x="996696" y="5193792"/>
+            <a:ext cx="2972714" cy="9525"/>
+          </a:xfrm>
+          <a:prstGeom prst="rect">
+            <a:avLst/>
+          </a:prstGeom>
+          <a:solidFill>
+            <a:srgbClr val="D8DEE6"/>
+          </a:solidFill>
+          <a:ln>
+            <a:noFill/>
+          </a:ln>
+          <a:effectLst/>
+        </p:spPr>
+        <p:style>
+          <a:lnRef idx="1">
+            <a:schemeClr val="accent1"/>
+          </a:lnRef>
+          <a:fillRef idx="3">
+            <a:schemeClr val="accent1"/>
+          </a:fillRef>
+          <a:effectRef idx="2">
+            <a:schemeClr val="accent1"/>
+          </a:effectRef>
+          <a:fontRef idx="minor">
+            <a:schemeClr val="lt1"/>
+          </a:fontRef>
+        </p:style>
+        <p:txBody>
+          <a:bodyPr rtlCol="0" anchor="ctr"/>
+          <a:lstStyle/>
+          <a:p/>
+        </p:txBody>
+      </p:sp>
+      <p:sp>
+        <p:nvSpPr>
+          <p:cNvPr id="20" name="TextBox 19"/>
+          <p:cNvSpPr txBox="1"/>
+          <p:nvPr/>
+        </p:nvSpPr>
+        <p:spPr>
+          <a:xfrm>
+            <a:off x="996696" y="5321808"/>
+            <a:ext cx="2972714" cy="438912"/>
+          </a:xfrm>
+          <a:prstGeom prst="rect">
+            <a:avLst/>
+          </a:prstGeom>
+          <a:noFill/>
+        </p:spPr>
+        <p:txBody>
+          <a:bodyPr wrap="square" anchor="t" lIns="0" rIns="0" tIns="0" bIns="0">
+            <a:spAutoFit/>
+          </a:bodyPr>
+          <a:lstStyle/>
+          <a:p>
+            <a:pPr algn="l">
+              <a:lnSpc>
+                <a:spcPct val="128000"/>
+              </a:lnSpc>
+            </a:pPr>
+            <a:r>
+              <a:rPr sz="1000" b="0">
+                <a:solidFill>
+                  <a:srgbClr val="768290"/>
+                </a:solidFill>
+                <a:latin typeface="Malgun Gothic"/>
+                <a:ea typeface="Malgun Gothic"/>
+                <a:cs typeface="Malgun Gothic"/>
+              </a:rPr>
+              <a:t>채점 기준 사전 고정 · 9/9 plateau 전수 측정 · 대안 11개 구성 기각 기록</a:t>
+            </a:r>
+          </a:p>
+        </p:txBody>
+      </p:sp>
+      <p:sp>
+        <p:nvSpPr>
+          <p:cNvPr id="21" name="Rectangle 20"/>
+          <p:cNvSpPr/>
+          <p:nvPr/>
+        </p:nvSpPr>
+        <p:spPr>
+          <a:xfrm>
+            <a:off x="4390034" y="2231136"/>
+            <a:ext cx="3411626" cy="3602736"/>
+          </a:xfrm>
+          <a:prstGeom prst="rect">
+            <a:avLst/>
+          </a:prstGeom>
+          <a:solidFill>
+            <a:srgbClr val="F5F7FA"/>
+          </a:solidFill>
+          <a:ln>
+            <a:noFill/>
+          </a:ln>
+          <a:effectLst/>
+        </p:spPr>
+        <p:style>
+          <a:lnRef idx="1">
+            <a:schemeClr val="accent1"/>
+          </a:lnRef>
+          <a:fillRef idx="3">
+            <a:schemeClr val="accent1"/>
+          </a:fillRef>
+          <a:effectRef idx="2">
+            <a:schemeClr val="accent1"/>
+          </a:effectRef>
+          <a:fontRef idx="minor">
+            <a:schemeClr val="lt1"/>
+          </a:fontRef>
+        </p:style>
+        <p:txBody>
+          <a:bodyPr rtlCol="0" anchor="ctr"/>
+          <a:lstStyle/>
+          <a:p/>
+        </p:txBody>
+      </p:sp>
+      <p:sp>
+        <p:nvSpPr>
+          <p:cNvPr id="22" name="Rectangle 21"/>
+          <p:cNvSpPr/>
+          <p:nvPr/>
+        </p:nvSpPr>
+        <p:spPr>
+          <a:xfrm>
+            <a:off x="4390034" y="2231136"/>
+            <a:ext cx="3411626" cy="658368"/>
+          </a:xfrm>
+          <a:prstGeom prst="rect">
+            <a:avLst/>
+          </a:prstGeom>
+          <a:solidFill>
+            <a:srgbClr val="1F3A5F"/>
+          </a:solidFill>
+          <a:ln>
+            <a:noFill/>
+          </a:ln>
+          <a:effectLst/>
+        </p:spPr>
+        <p:style>
+          <a:lnRef idx="1">
+            <a:schemeClr val="accent1"/>
+          </a:lnRef>
+          <a:fillRef idx="3">
+            <a:schemeClr val="accent1"/>
+          </a:fillRef>
+          <a:effectRef idx="2">
+            <a:schemeClr val="accent1"/>
+          </a:effectRef>
+          <a:fontRef idx="minor">
+            <a:schemeClr val="lt1"/>
+          </a:fontRef>
+        </p:style>
+        <p:txBody>
+          <a:bodyPr rtlCol="0" anchor="ctr"/>
+          <a:lstStyle/>
+          <a:p/>
+        </p:txBody>
+      </p:sp>
+      <p:sp>
+        <p:nvSpPr>
+          <p:cNvPr id="23" name="TextBox 22"/>
+          <p:cNvSpPr txBox="1"/>
+          <p:nvPr/>
+        </p:nvSpPr>
+        <p:spPr>
+          <a:xfrm>
+            <a:off x="4609490" y="2322576"/>
+            <a:ext cx="2972714" cy="292608"/>
           </a:xfrm>
           <a:prstGeom prst="rect">
             <a:avLst/>
@@ -11792,29 +13059,29 @@
               </a:lnSpc>
             </a:pPr>
             <a:r>
-              <a:rPr sz="1600" b="1">
-                <a:solidFill>
-                  <a:srgbClr val="C8A24B"/>
+              <a:rPr sz="1900" b="1">
+                <a:solidFill>
+                  <a:srgbClr val="FFFFFF"/>
                 </a:solidFill>
                 <a:latin typeface="Malgun Gothic"/>
                 <a:ea typeface="Malgun Gothic"/>
                 <a:cs typeface="Malgun Gothic"/>
               </a:rPr>
-              <a:t>CAGR 13.6%   ·   MDD −12.7%   ·   Calmar 1.07   ·   최악의 해 +2.2%</a:t>
-            </a:r>
-          </a:p>
-        </p:txBody>
-      </p:sp>
-      <p:sp>
-        <p:nvSpPr>
-          <p:cNvPr id="8" name="TextBox 7"/>
+              <a:t>CTO</a:t>
+            </a:r>
+          </a:p>
+        </p:txBody>
+      </p:sp>
+      <p:sp>
+        <p:nvSpPr>
+          <p:cNvPr id="24" name="TextBox 23"/>
           <p:cNvSpPr txBox="1"/>
           <p:nvPr/>
         </p:nvSpPr>
         <p:spPr>
           <a:xfrm>
-            <a:off x="777240" y="5943600"/>
-            <a:ext cx="10637215" cy="274320"/>
+            <a:off x="4609490" y="2633472"/>
+            <a:ext cx="2972714" cy="219456"/>
           </a:xfrm>
           <a:prstGeom prst="rect">
             <a:avLst/>
@@ -11833,15 +13100,1052 @@
               </a:lnSpc>
             </a:pPr>
             <a:r>
-              <a:rPr sz="1200" b="0">
-                <a:solidFill>
-                  <a:srgbClr val="8C9DB5"/>
+              <a:rPr sz="1050" b="0">
+                <a:solidFill>
+                  <a:srgbClr val="C8A24B"/>
                 </a:solidFill>
                 <a:latin typeface="Malgun Gothic"/>
                 <a:ea typeface="Malgun Gothic"/>
                 <a:cs typeface="Malgun Gothic"/>
               </a:rPr>
-              <a:t>헬름 IRP세븐서티액티브  ·  AI퀀트 2기 2조  ·  재현 브랜치 v2-tier2a-freeze</a:t>
+              <a:t>최고기술책임자 · 엔진 · 데이터</a:t>
+            </a:r>
+          </a:p>
+        </p:txBody>
+      </p:sp>
+      <p:sp>
+        <p:nvSpPr>
+          <p:cNvPr id="25" name="Rectangle 24"/>
+          <p:cNvSpPr/>
+          <p:nvPr/>
+        </p:nvSpPr>
+        <p:spPr>
+          <a:xfrm>
+            <a:off x="4609490" y="3136392"/>
+            <a:ext cx="54864" cy="54864"/>
+          </a:xfrm>
+          <a:prstGeom prst="rect">
+            <a:avLst/>
+          </a:prstGeom>
+          <a:solidFill>
+            <a:srgbClr val="C8A24B"/>
+          </a:solidFill>
+          <a:ln>
+            <a:noFill/>
+          </a:ln>
+          <a:effectLst/>
+        </p:spPr>
+        <p:style>
+          <a:lnRef idx="1">
+            <a:schemeClr val="accent1"/>
+          </a:lnRef>
+          <a:fillRef idx="3">
+            <a:schemeClr val="accent1"/>
+          </a:fillRef>
+          <a:effectRef idx="2">
+            <a:schemeClr val="accent1"/>
+          </a:effectRef>
+          <a:fontRef idx="minor">
+            <a:schemeClr val="lt1"/>
+          </a:fontRef>
+        </p:style>
+        <p:txBody>
+          <a:bodyPr rtlCol="0" anchor="ctr"/>
+          <a:lstStyle/>
+          <a:p/>
+        </p:txBody>
+      </p:sp>
+      <p:sp>
+        <p:nvSpPr>
+          <p:cNvPr id="26" name="TextBox 25"/>
+          <p:cNvSpPr txBox="1"/>
+          <p:nvPr/>
+        </p:nvSpPr>
+        <p:spPr>
+          <a:xfrm>
+            <a:off x="4755794" y="3072384"/>
+            <a:ext cx="2808122" cy="502920"/>
+          </a:xfrm>
+          <a:prstGeom prst="rect">
+            <a:avLst/>
+          </a:prstGeom>
+          <a:noFill/>
+        </p:spPr>
+        <p:txBody>
+          <a:bodyPr wrap="square" anchor="t" lIns="0" rIns="0" tIns="0" bIns="0">
+            <a:spAutoFit/>
+          </a:bodyPr>
+          <a:lstStyle/>
+          <a:p>
+            <a:pPr algn="l">
+              <a:lnSpc>
+                <a:spcPct val="130000"/>
+              </a:lnSpc>
+            </a:pPr>
+            <a:r>
+              <a:rPr sz="1100" b="0">
+                <a:solidFill>
+                  <a:srgbClr val="44505E"/>
+                </a:solidFill>
+                <a:latin typeface="Malgun Gothic"/>
+                <a:ea typeface="Malgun Gothic"/>
+                <a:cs typeface="Malgun Gothic"/>
+              </a:rPr>
+              <a:t>데이터 수집·전처리 파이프라인(Parquet 캐시)</a:t>
+            </a:r>
+          </a:p>
+        </p:txBody>
+      </p:sp>
+      <p:sp>
+        <p:nvSpPr>
+          <p:cNvPr id="27" name="Rectangle 26"/>
+          <p:cNvSpPr/>
+          <p:nvPr/>
+        </p:nvSpPr>
+        <p:spPr>
+          <a:xfrm>
+            <a:off x="4609490" y="3666744"/>
+            <a:ext cx="54864" cy="54864"/>
+          </a:xfrm>
+          <a:prstGeom prst="rect">
+            <a:avLst/>
+          </a:prstGeom>
+          <a:solidFill>
+            <a:srgbClr val="C8A24B"/>
+          </a:solidFill>
+          <a:ln>
+            <a:noFill/>
+          </a:ln>
+          <a:effectLst/>
+        </p:spPr>
+        <p:style>
+          <a:lnRef idx="1">
+            <a:schemeClr val="accent1"/>
+          </a:lnRef>
+          <a:fillRef idx="3">
+            <a:schemeClr val="accent1"/>
+          </a:fillRef>
+          <a:effectRef idx="2">
+            <a:schemeClr val="accent1"/>
+          </a:effectRef>
+          <a:fontRef idx="minor">
+            <a:schemeClr val="lt1"/>
+          </a:fontRef>
+        </p:style>
+        <p:txBody>
+          <a:bodyPr rtlCol="0" anchor="ctr"/>
+          <a:lstStyle/>
+          <a:p/>
+        </p:txBody>
+      </p:sp>
+      <p:sp>
+        <p:nvSpPr>
+          <p:cNvPr id="28" name="TextBox 27"/>
+          <p:cNvSpPr txBox="1"/>
+          <p:nvPr/>
+        </p:nvSpPr>
+        <p:spPr>
+          <a:xfrm>
+            <a:off x="4755794" y="3602736"/>
+            <a:ext cx="2808122" cy="502920"/>
+          </a:xfrm>
+          <a:prstGeom prst="rect">
+            <a:avLst/>
+          </a:prstGeom>
+          <a:noFill/>
+        </p:spPr>
+        <p:txBody>
+          <a:bodyPr wrap="square" anchor="t" lIns="0" rIns="0" tIns="0" bIns="0">
+            <a:spAutoFit/>
+          </a:bodyPr>
+          <a:lstStyle/>
+          <a:p>
+            <a:pPr algn="l">
+              <a:lnSpc>
+                <a:spcPct val="130000"/>
+              </a:lnSpc>
+            </a:pPr>
+            <a:r>
+              <a:rPr sz="1100" b="0">
+                <a:solidFill>
+                  <a:srgbClr val="44505E"/>
+                </a:solidFill>
+                <a:latin typeface="Malgun Gothic"/>
+                <a:ea typeface="Malgun Gothic"/>
+                <a:cs typeface="Malgun Gothic"/>
+              </a:rPr>
+              <a:t>백테스트 엔진 및 지표 코드화(67파일 8,123줄)</a:t>
+            </a:r>
+          </a:p>
+        </p:txBody>
+      </p:sp>
+      <p:sp>
+        <p:nvSpPr>
+          <p:cNvPr id="29" name="Rectangle 28"/>
+          <p:cNvSpPr/>
+          <p:nvPr/>
+        </p:nvSpPr>
+        <p:spPr>
+          <a:xfrm>
+            <a:off x="4609490" y="4197096"/>
+            <a:ext cx="54864" cy="54864"/>
+          </a:xfrm>
+          <a:prstGeom prst="rect">
+            <a:avLst/>
+          </a:prstGeom>
+          <a:solidFill>
+            <a:srgbClr val="C8A24B"/>
+          </a:solidFill>
+          <a:ln>
+            <a:noFill/>
+          </a:ln>
+          <a:effectLst/>
+        </p:spPr>
+        <p:style>
+          <a:lnRef idx="1">
+            <a:schemeClr val="accent1"/>
+          </a:lnRef>
+          <a:fillRef idx="3">
+            <a:schemeClr val="accent1"/>
+          </a:fillRef>
+          <a:effectRef idx="2">
+            <a:schemeClr val="accent1"/>
+          </a:effectRef>
+          <a:fontRef idx="minor">
+            <a:schemeClr val="lt1"/>
+          </a:fontRef>
+        </p:style>
+        <p:txBody>
+          <a:bodyPr rtlCol="0" anchor="ctr"/>
+          <a:lstStyle/>
+          <a:p/>
+        </p:txBody>
+      </p:sp>
+      <p:sp>
+        <p:nvSpPr>
+          <p:cNvPr id="30" name="TextBox 29"/>
+          <p:cNvSpPr txBox="1"/>
+          <p:nvPr/>
+        </p:nvSpPr>
+        <p:spPr>
+          <a:xfrm>
+            <a:off x="4755794" y="4133088"/>
+            <a:ext cx="2808122" cy="502920"/>
+          </a:xfrm>
+          <a:prstGeom prst="rect">
+            <a:avLst/>
+          </a:prstGeom>
+          <a:noFill/>
+        </p:spPr>
+        <p:txBody>
+          <a:bodyPr wrap="square" anchor="t" lIns="0" rIns="0" tIns="0" bIns="0">
+            <a:spAutoFit/>
+          </a:bodyPr>
+          <a:lstStyle/>
+          <a:p>
+            <a:pPr algn="l">
+              <a:lnSpc>
+                <a:spcPct val="130000"/>
+              </a:lnSpc>
+            </a:pPr>
+            <a:r>
+              <a:rPr sz="1100" b="0">
+                <a:solidFill>
+                  <a:srgbClr val="44505E"/>
+                </a:solidFill>
+                <a:latin typeface="Malgun Gothic"/>
+                <a:ea typeface="Malgun Gothic"/>
+                <a:cs typeface="Malgun Gothic"/>
+              </a:rPr>
+              <a:t>무결성 fail-loud 가드 · 관측 프로브 구현</a:t>
+            </a:r>
+          </a:p>
+        </p:txBody>
+      </p:sp>
+      <p:sp>
+        <p:nvSpPr>
+          <p:cNvPr id="31" name="Rectangle 30"/>
+          <p:cNvSpPr/>
+          <p:nvPr/>
+        </p:nvSpPr>
+        <p:spPr>
+          <a:xfrm>
+            <a:off x="4609490" y="4727447"/>
+            <a:ext cx="54864" cy="54864"/>
+          </a:xfrm>
+          <a:prstGeom prst="rect">
+            <a:avLst/>
+          </a:prstGeom>
+          <a:solidFill>
+            <a:srgbClr val="C8A24B"/>
+          </a:solidFill>
+          <a:ln>
+            <a:noFill/>
+          </a:ln>
+          <a:effectLst/>
+        </p:spPr>
+        <p:style>
+          <a:lnRef idx="1">
+            <a:schemeClr val="accent1"/>
+          </a:lnRef>
+          <a:fillRef idx="3">
+            <a:schemeClr val="accent1"/>
+          </a:fillRef>
+          <a:effectRef idx="2">
+            <a:schemeClr val="accent1"/>
+          </a:effectRef>
+          <a:fontRef idx="minor">
+            <a:schemeClr val="lt1"/>
+          </a:fontRef>
+        </p:style>
+        <p:txBody>
+          <a:bodyPr rtlCol="0" anchor="ctr"/>
+          <a:lstStyle/>
+          <a:p/>
+        </p:txBody>
+      </p:sp>
+      <p:sp>
+        <p:nvSpPr>
+          <p:cNvPr id="32" name="TextBox 31"/>
+          <p:cNvSpPr txBox="1"/>
+          <p:nvPr/>
+        </p:nvSpPr>
+        <p:spPr>
+          <a:xfrm>
+            <a:off x="4755794" y="4663439"/>
+            <a:ext cx="2808122" cy="502920"/>
+          </a:xfrm>
+          <a:prstGeom prst="rect">
+            <a:avLst/>
+          </a:prstGeom>
+          <a:noFill/>
+        </p:spPr>
+        <p:txBody>
+          <a:bodyPr wrap="square" anchor="t" lIns="0" rIns="0" tIns="0" bIns="0">
+            <a:spAutoFit/>
+          </a:bodyPr>
+          <a:lstStyle/>
+          <a:p>
+            <a:pPr algn="l">
+              <a:lnSpc>
+                <a:spcPct val="130000"/>
+              </a:lnSpc>
+            </a:pPr>
+            <a:r>
+              <a:rPr sz="1100" b="0">
+                <a:solidFill>
+                  <a:srgbClr val="44505E"/>
+                </a:solidFill>
+                <a:latin typeface="Malgun Gothic"/>
+                <a:ea typeface="Malgun Gothic"/>
+                <a:cs typeface="Malgun Gothic"/>
+              </a:rPr>
+              <a:t>재현 브랜치 동결 및 실험 스크립트 분리</a:t>
+            </a:r>
+          </a:p>
+        </p:txBody>
+      </p:sp>
+      <p:sp>
+        <p:nvSpPr>
+          <p:cNvPr id="33" name="Rectangle 32"/>
+          <p:cNvSpPr/>
+          <p:nvPr/>
+        </p:nvSpPr>
+        <p:spPr>
+          <a:xfrm>
+            <a:off x="4609490" y="5193792"/>
+            <a:ext cx="2972714" cy="9525"/>
+          </a:xfrm>
+          <a:prstGeom prst="rect">
+            <a:avLst/>
+          </a:prstGeom>
+          <a:solidFill>
+            <a:srgbClr val="D8DEE6"/>
+          </a:solidFill>
+          <a:ln>
+            <a:noFill/>
+          </a:ln>
+          <a:effectLst/>
+        </p:spPr>
+        <p:style>
+          <a:lnRef idx="1">
+            <a:schemeClr val="accent1"/>
+          </a:lnRef>
+          <a:fillRef idx="3">
+            <a:schemeClr val="accent1"/>
+          </a:fillRef>
+          <a:effectRef idx="2">
+            <a:schemeClr val="accent1"/>
+          </a:effectRef>
+          <a:fontRef idx="minor">
+            <a:schemeClr val="lt1"/>
+          </a:fontRef>
+        </p:style>
+        <p:txBody>
+          <a:bodyPr rtlCol="0" anchor="ctr"/>
+          <a:lstStyle/>
+          <a:p/>
+        </p:txBody>
+      </p:sp>
+      <p:sp>
+        <p:nvSpPr>
+          <p:cNvPr id="34" name="TextBox 33"/>
+          <p:cNvSpPr txBox="1"/>
+          <p:nvPr/>
+        </p:nvSpPr>
+        <p:spPr>
+          <a:xfrm>
+            <a:off x="4609490" y="5321808"/>
+            <a:ext cx="2972714" cy="438912"/>
+          </a:xfrm>
+          <a:prstGeom prst="rect">
+            <a:avLst/>
+          </a:prstGeom>
+          <a:noFill/>
+        </p:spPr>
+        <p:txBody>
+          <a:bodyPr wrap="square" anchor="t" lIns="0" rIns="0" tIns="0" bIns="0">
+            <a:spAutoFit/>
+          </a:bodyPr>
+          <a:lstStyle/>
+          <a:p>
+            <a:pPr algn="l">
+              <a:lnSpc>
+                <a:spcPct val="128000"/>
+              </a:lnSpc>
+            </a:pPr>
+            <a:r>
+              <a:rPr sz="1000" b="0">
+                <a:solidFill>
+                  <a:srgbClr val="768290"/>
+                </a:solidFill>
+                <a:latin typeface="Malgun Gothic"/>
+                <a:ea typeface="Malgun Gothic"/>
+                <a:cs typeface="Malgun Gothic"/>
+              </a:rPr>
+              <a:t>룩어헤드 구조적 차단 · 결정론적 재현 · 검증 32항목 문서화</a:t>
+            </a:r>
+          </a:p>
+        </p:txBody>
+      </p:sp>
+      <p:sp>
+        <p:nvSpPr>
+          <p:cNvPr id="35" name="Rectangle 34"/>
+          <p:cNvSpPr/>
+          <p:nvPr/>
+        </p:nvSpPr>
+        <p:spPr>
+          <a:xfrm>
+            <a:off x="8002828" y="2231136"/>
+            <a:ext cx="3411626" cy="3602736"/>
+          </a:xfrm>
+          <a:prstGeom prst="rect">
+            <a:avLst/>
+          </a:prstGeom>
+          <a:solidFill>
+            <a:srgbClr val="F5F7FA"/>
+          </a:solidFill>
+          <a:ln>
+            <a:noFill/>
+          </a:ln>
+          <a:effectLst/>
+        </p:spPr>
+        <p:style>
+          <a:lnRef idx="1">
+            <a:schemeClr val="accent1"/>
+          </a:lnRef>
+          <a:fillRef idx="3">
+            <a:schemeClr val="accent1"/>
+          </a:fillRef>
+          <a:effectRef idx="2">
+            <a:schemeClr val="accent1"/>
+          </a:effectRef>
+          <a:fontRef idx="minor">
+            <a:schemeClr val="lt1"/>
+          </a:fontRef>
+        </p:style>
+        <p:txBody>
+          <a:bodyPr rtlCol="0" anchor="ctr"/>
+          <a:lstStyle/>
+          <a:p/>
+        </p:txBody>
+      </p:sp>
+      <p:sp>
+        <p:nvSpPr>
+          <p:cNvPr id="36" name="Rectangle 35"/>
+          <p:cNvSpPr/>
+          <p:nvPr/>
+        </p:nvSpPr>
+        <p:spPr>
+          <a:xfrm>
+            <a:off x="8002828" y="2231136"/>
+            <a:ext cx="3411626" cy="658368"/>
+          </a:xfrm>
+          <a:prstGeom prst="rect">
+            <a:avLst/>
+          </a:prstGeom>
+          <a:solidFill>
+            <a:srgbClr val="1F3A5F"/>
+          </a:solidFill>
+          <a:ln>
+            <a:noFill/>
+          </a:ln>
+          <a:effectLst/>
+        </p:spPr>
+        <p:style>
+          <a:lnRef idx="1">
+            <a:schemeClr val="accent1"/>
+          </a:lnRef>
+          <a:fillRef idx="3">
+            <a:schemeClr val="accent1"/>
+          </a:fillRef>
+          <a:effectRef idx="2">
+            <a:schemeClr val="accent1"/>
+          </a:effectRef>
+          <a:fontRef idx="minor">
+            <a:schemeClr val="lt1"/>
+          </a:fontRef>
+        </p:style>
+        <p:txBody>
+          <a:bodyPr rtlCol="0" anchor="ctr"/>
+          <a:lstStyle/>
+          <a:p/>
+        </p:txBody>
+      </p:sp>
+      <p:sp>
+        <p:nvSpPr>
+          <p:cNvPr id="37" name="TextBox 36"/>
+          <p:cNvSpPr txBox="1"/>
+          <p:nvPr/>
+        </p:nvSpPr>
+        <p:spPr>
+          <a:xfrm>
+            <a:off x="8222284" y="2322576"/>
+            <a:ext cx="2972714" cy="292608"/>
+          </a:xfrm>
+          <a:prstGeom prst="rect">
+            <a:avLst/>
+          </a:prstGeom>
+          <a:noFill/>
+        </p:spPr>
+        <p:txBody>
+          <a:bodyPr wrap="square" anchor="t" lIns="0" rIns="0" tIns="0" bIns="0">
+            <a:spAutoFit/>
+          </a:bodyPr>
+          <a:lstStyle/>
+          <a:p>
+            <a:pPr algn="l">
+              <a:lnSpc>
+                <a:spcPct val="125000"/>
+              </a:lnSpc>
+            </a:pPr>
+            <a:r>
+              <a:rPr sz="1900" b="1">
+                <a:solidFill>
+                  <a:srgbClr val="FFFFFF"/>
+                </a:solidFill>
+                <a:latin typeface="Malgun Gothic"/>
+                <a:ea typeface="Malgun Gothic"/>
+                <a:cs typeface="Malgun Gothic"/>
+              </a:rPr>
+              <a:t>CMO</a:t>
+            </a:r>
+          </a:p>
+        </p:txBody>
+      </p:sp>
+      <p:sp>
+        <p:nvSpPr>
+          <p:cNvPr id="38" name="TextBox 37"/>
+          <p:cNvSpPr txBox="1"/>
+          <p:nvPr/>
+        </p:nvSpPr>
+        <p:spPr>
+          <a:xfrm>
+            <a:off x="8222284" y="2633472"/>
+            <a:ext cx="2972714" cy="219456"/>
+          </a:xfrm>
+          <a:prstGeom prst="rect">
+            <a:avLst/>
+          </a:prstGeom>
+          <a:noFill/>
+        </p:spPr>
+        <p:txBody>
+          <a:bodyPr wrap="square" anchor="t" lIns="0" rIns="0" tIns="0" bIns="0">
+            <a:spAutoFit/>
+          </a:bodyPr>
+          <a:lstStyle/>
+          <a:p>
+            <a:pPr algn="l">
+              <a:lnSpc>
+                <a:spcPct val="125000"/>
+              </a:lnSpc>
+            </a:pPr>
+            <a:r>
+              <a:rPr sz="1050" b="0">
+                <a:solidFill>
+                  <a:srgbClr val="C8A24B"/>
+                </a:solidFill>
+                <a:latin typeface="Malgun Gothic"/>
+                <a:ea typeface="Malgun Gothic"/>
+                <a:cs typeface="Malgun Gothic"/>
+              </a:rPr>
+              <a:t>최고마케팅책임자 · 상품 · 발표</a:t>
+            </a:r>
+          </a:p>
+        </p:txBody>
+      </p:sp>
+      <p:sp>
+        <p:nvSpPr>
+          <p:cNvPr id="39" name="Rectangle 38"/>
+          <p:cNvSpPr/>
+          <p:nvPr/>
+        </p:nvSpPr>
+        <p:spPr>
+          <a:xfrm>
+            <a:off x="8222284" y="3136392"/>
+            <a:ext cx="54864" cy="54864"/>
+          </a:xfrm>
+          <a:prstGeom prst="rect">
+            <a:avLst/>
+          </a:prstGeom>
+          <a:solidFill>
+            <a:srgbClr val="C8A24B"/>
+          </a:solidFill>
+          <a:ln>
+            <a:noFill/>
+          </a:ln>
+          <a:effectLst/>
+        </p:spPr>
+        <p:style>
+          <a:lnRef idx="1">
+            <a:schemeClr val="accent1"/>
+          </a:lnRef>
+          <a:fillRef idx="3">
+            <a:schemeClr val="accent1"/>
+          </a:fillRef>
+          <a:effectRef idx="2">
+            <a:schemeClr val="accent1"/>
+          </a:effectRef>
+          <a:fontRef idx="minor">
+            <a:schemeClr val="lt1"/>
+          </a:fontRef>
+        </p:style>
+        <p:txBody>
+          <a:bodyPr rtlCol="0" anchor="ctr"/>
+          <a:lstStyle/>
+          <a:p/>
+        </p:txBody>
+      </p:sp>
+      <p:sp>
+        <p:nvSpPr>
+          <p:cNvPr id="40" name="TextBox 39"/>
+          <p:cNvSpPr txBox="1"/>
+          <p:nvPr/>
+        </p:nvSpPr>
+        <p:spPr>
+          <a:xfrm>
+            <a:off x="8368588" y="3072384"/>
+            <a:ext cx="2808122" cy="502920"/>
+          </a:xfrm>
+          <a:prstGeom prst="rect">
+            <a:avLst/>
+          </a:prstGeom>
+          <a:noFill/>
+        </p:spPr>
+        <p:txBody>
+          <a:bodyPr wrap="square" anchor="t" lIns="0" rIns="0" tIns="0" bIns="0">
+            <a:spAutoFit/>
+          </a:bodyPr>
+          <a:lstStyle/>
+          <a:p>
+            <a:pPr algn="l">
+              <a:lnSpc>
+                <a:spcPct val="130000"/>
+              </a:lnSpc>
+            </a:pPr>
+            <a:r>
+              <a:rPr sz="1100" b="0">
+                <a:solidFill>
+                  <a:srgbClr val="44505E"/>
+                </a:solidFill>
+                <a:latin typeface="Malgun Gothic"/>
+                <a:ea typeface="Malgun Gothic"/>
+                <a:cs typeface="Malgun Gothic"/>
+              </a:rPr>
+              <a:t>타깃 고객 정의 및 네이밍(헬름 IRP세븐서티액티브)</a:t>
+            </a:r>
+          </a:p>
+        </p:txBody>
+      </p:sp>
+      <p:sp>
+        <p:nvSpPr>
+          <p:cNvPr id="41" name="Rectangle 40"/>
+          <p:cNvSpPr/>
+          <p:nvPr/>
+        </p:nvSpPr>
+        <p:spPr>
+          <a:xfrm>
+            <a:off x="8222284" y="3666744"/>
+            <a:ext cx="54864" cy="54864"/>
+          </a:xfrm>
+          <a:prstGeom prst="rect">
+            <a:avLst/>
+          </a:prstGeom>
+          <a:solidFill>
+            <a:srgbClr val="C8A24B"/>
+          </a:solidFill>
+          <a:ln>
+            <a:noFill/>
+          </a:ln>
+          <a:effectLst/>
+        </p:spPr>
+        <p:style>
+          <a:lnRef idx="1">
+            <a:schemeClr val="accent1"/>
+          </a:lnRef>
+          <a:fillRef idx="3">
+            <a:schemeClr val="accent1"/>
+          </a:fillRef>
+          <a:effectRef idx="2">
+            <a:schemeClr val="accent1"/>
+          </a:effectRef>
+          <a:fontRef idx="minor">
+            <a:schemeClr val="lt1"/>
+          </a:fontRef>
+        </p:style>
+        <p:txBody>
+          <a:bodyPr rtlCol="0" anchor="ctr"/>
+          <a:lstStyle/>
+          <a:p/>
+        </p:txBody>
+      </p:sp>
+      <p:sp>
+        <p:nvSpPr>
+          <p:cNvPr id="42" name="TextBox 41"/>
+          <p:cNvSpPr txBox="1"/>
+          <p:nvPr/>
+        </p:nvSpPr>
+        <p:spPr>
+          <a:xfrm>
+            <a:off x="8368588" y="3602736"/>
+            <a:ext cx="2808122" cy="502920"/>
+          </a:xfrm>
+          <a:prstGeom prst="rect">
+            <a:avLst/>
+          </a:prstGeom>
+          <a:noFill/>
+        </p:spPr>
+        <p:txBody>
+          <a:bodyPr wrap="square" anchor="t" lIns="0" rIns="0" tIns="0" bIns="0">
+            <a:spAutoFit/>
+          </a:bodyPr>
+          <a:lstStyle/>
+          <a:p>
+            <a:pPr algn="l">
+              <a:lnSpc>
+                <a:spcPct val="130000"/>
+              </a:lnSpc>
+            </a:pPr>
+            <a:r>
+              <a:rPr sz="1100" b="0">
+                <a:solidFill>
+                  <a:srgbClr val="44505E"/>
+                </a:solidFill>
+                <a:latin typeface="Malgun Gothic"/>
+                <a:ea typeface="Malgun Gothic"/>
+                <a:cs typeface="Malgun Gothic"/>
+              </a:rPr>
+              <a:t>투자제안서 v1.3 작성</a:t>
+            </a:r>
+          </a:p>
+        </p:txBody>
+      </p:sp>
+      <p:sp>
+        <p:nvSpPr>
+          <p:cNvPr id="43" name="Rectangle 42"/>
+          <p:cNvSpPr/>
+          <p:nvPr/>
+        </p:nvSpPr>
+        <p:spPr>
+          <a:xfrm>
+            <a:off x="8222284" y="4197096"/>
+            <a:ext cx="54864" cy="54864"/>
+          </a:xfrm>
+          <a:prstGeom prst="rect">
+            <a:avLst/>
+          </a:prstGeom>
+          <a:solidFill>
+            <a:srgbClr val="C8A24B"/>
+          </a:solidFill>
+          <a:ln>
+            <a:noFill/>
+          </a:ln>
+          <a:effectLst/>
+        </p:spPr>
+        <p:style>
+          <a:lnRef idx="1">
+            <a:schemeClr val="accent1"/>
+          </a:lnRef>
+          <a:fillRef idx="3">
+            <a:schemeClr val="accent1"/>
+          </a:fillRef>
+          <a:effectRef idx="2">
+            <a:schemeClr val="accent1"/>
+          </a:effectRef>
+          <a:fontRef idx="minor">
+            <a:schemeClr val="lt1"/>
+          </a:fontRef>
+        </p:style>
+        <p:txBody>
+          <a:bodyPr rtlCol="0" anchor="ctr"/>
+          <a:lstStyle/>
+          <a:p/>
+        </p:txBody>
+      </p:sp>
+      <p:sp>
+        <p:nvSpPr>
+          <p:cNvPr id="44" name="TextBox 43"/>
+          <p:cNvSpPr txBox="1"/>
+          <p:nvPr/>
+        </p:nvSpPr>
+        <p:spPr>
+          <a:xfrm>
+            <a:off x="8368588" y="4133088"/>
+            <a:ext cx="2808122" cy="502920"/>
+          </a:xfrm>
+          <a:prstGeom prst="rect">
+            <a:avLst/>
+          </a:prstGeom>
+          <a:noFill/>
+        </p:spPr>
+        <p:txBody>
+          <a:bodyPr wrap="square" anchor="t" lIns="0" rIns="0" tIns="0" bIns="0">
+            <a:spAutoFit/>
+          </a:bodyPr>
+          <a:lstStyle/>
+          <a:p>
+            <a:pPr algn="l">
+              <a:lnSpc>
+                <a:spcPct val="130000"/>
+              </a:lnSpc>
+            </a:pPr>
+            <a:r>
+              <a:rPr sz="1100" b="0">
+                <a:solidFill>
+                  <a:srgbClr val="44505E"/>
+                </a:solidFill>
+                <a:latin typeface="Malgun Gothic"/>
+                <a:ea typeface="Malgun Gothic"/>
+                <a:cs typeface="Malgun Gothic"/>
+              </a:rPr>
+              <a:t>투자설명서 19p · 간이투자설명서 5p 제작</a:t>
+            </a:r>
+          </a:p>
+        </p:txBody>
+      </p:sp>
+      <p:sp>
+        <p:nvSpPr>
+          <p:cNvPr id="45" name="Rectangle 44"/>
+          <p:cNvSpPr/>
+          <p:nvPr/>
+        </p:nvSpPr>
+        <p:spPr>
+          <a:xfrm>
+            <a:off x="8222284" y="4727447"/>
+            <a:ext cx="54864" cy="54864"/>
+          </a:xfrm>
+          <a:prstGeom prst="rect">
+            <a:avLst/>
+          </a:prstGeom>
+          <a:solidFill>
+            <a:srgbClr val="C8A24B"/>
+          </a:solidFill>
+          <a:ln>
+            <a:noFill/>
+          </a:ln>
+          <a:effectLst/>
+        </p:spPr>
+        <p:style>
+          <a:lnRef idx="1">
+            <a:schemeClr val="accent1"/>
+          </a:lnRef>
+          <a:fillRef idx="3">
+            <a:schemeClr val="accent1"/>
+          </a:fillRef>
+          <a:effectRef idx="2">
+            <a:schemeClr val="accent1"/>
+          </a:effectRef>
+          <a:fontRef idx="minor">
+            <a:schemeClr val="lt1"/>
+          </a:fontRef>
+        </p:style>
+        <p:txBody>
+          <a:bodyPr rtlCol="0" anchor="ctr"/>
+          <a:lstStyle/>
+          <a:p/>
+        </p:txBody>
+      </p:sp>
+      <p:sp>
+        <p:nvSpPr>
+          <p:cNvPr id="46" name="TextBox 45"/>
+          <p:cNvSpPr txBox="1"/>
+          <p:nvPr/>
+        </p:nvSpPr>
+        <p:spPr>
+          <a:xfrm>
+            <a:off x="8368588" y="4663439"/>
+            <a:ext cx="2808122" cy="502920"/>
+          </a:xfrm>
+          <a:prstGeom prst="rect">
+            <a:avLst/>
+          </a:prstGeom>
+          <a:noFill/>
+        </p:spPr>
+        <p:txBody>
+          <a:bodyPr wrap="square" anchor="t" lIns="0" rIns="0" tIns="0" bIns="0">
+            <a:spAutoFit/>
+          </a:bodyPr>
+          <a:lstStyle/>
+          <a:p>
+            <a:pPr algn="l">
+              <a:lnSpc>
+                <a:spcPct val="130000"/>
+              </a:lnSpc>
+            </a:pPr>
+            <a:r>
+              <a:rPr sz="1100" b="0">
+                <a:solidFill>
+                  <a:srgbClr val="44505E"/>
+                </a:solidFill>
+                <a:latin typeface="Malgun Gothic"/>
+                <a:ea typeface="Malgun Gothic"/>
+                <a:cs typeface="Malgun Gothic"/>
+              </a:rPr>
+              <a:t>발표자료 20장 및 발표 대본 구성</a:t>
+            </a:r>
+          </a:p>
+        </p:txBody>
+      </p:sp>
+      <p:sp>
+        <p:nvSpPr>
+          <p:cNvPr id="47" name="Rectangle 46"/>
+          <p:cNvSpPr/>
+          <p:nvPr/>
+        </p:nvSpPr>
+        <p:spPr>
+          <a:xfrm>
+            <a:off x="8222284" y="5193792"/>
+            <a:ext cx="2972714" cy="9525"/>
+          </a:xfrm>
+          <a:prstGeom prst="rect">
+            <a:avLst/>
+          </a:prstGeom>
+          <a:solidFill>
+            <a:srgbClr val="D8DEE6"/>
+          </a:solidFill>
+          <a:ln>
+            <a:noFill/>
+          </a:ln>
+          <a:effectLst/>
+        </p:spPr>
+        <p:style>
+          <a:lnRef idx="1">
+            <a:schemeClr val="accent1"/>
+          </a:lnRef>
+          <a:fillRef idx="3">
+            <a:schemeClr val="accent1"/>
+          </a:fillRef>
+          <a:effectRef idx="2">
+            <a:schemeClr val="accent1"/>
+          </a:effectRef>
+          <a:fontRef idx="minor">
+            <a:schemeClr val="lt1"/>
+          </a:fontRef>
+        </p:style>
+        <p:txBody>
+          <a:bodyPr rtlCol="0" anchor="ctr"/>
+          <a:lstStyle/>
+          <a:p/>
+        </p:txBody>
+      </p:sp>
+      <p:sp>
+        <p:nvSpPr>
+          <p:cNvPr id="48" name="TextBox 47"/>
+          <p:cNvSpPr txBox="1"/>
+          <p:nvPr/>
+        </p:nvSpPr>
+        <p:spPr>
+          <a:xfrm>
+            <a:off x="8222284" y="5321808"/>
+            <a:ext cx="2972714" cy="438912"/>
+          </a:xfrm>
+          <a:prstGeom prst="rect">
+            <a:avLst/>
+          </a:prstGeom>
+          <a:noFill/>
+        </p:spPr>
+        <p:txBody>
+          <a:bodyPr wrap="square" anchor="t" lIns="0" rIns="0" tIns="0" bIns="0">
+            <a:spAutoFit/>
+          </a:bodyPr>
+          <a:lstStyle/>
+          <a:p>
+            <a:pPr algn="l">
+              <a:lnSpc>
+                <a:spcPct val="128000"/>
+              </a:lnSpc>
+            </a:pPr>
+            <a:r>
+              <a:rPr sz="1000" b="0">
+                <a:solidFill>
+                  <a:srgbClr val="768290"/>
+                </a:solidFill>
+                <a:latin typeface="Malgun Gothic"/>
+                <a:ea typeface="Malgun Gothic"/>
+                <a:cs typeface="Malgun Gothic"/>
+              </a:rPr>
+              <a:t>성과 스토리텔링 · 약점 선공개 원칙 · 예상질문 대응 준비</a:t>
+            </a:r>
+          </a:p>
+        </p:txBody>
+      </p:sp>
+      <p:sp>
+        <p:nvSpPr>
+          <p:cNvPr id="49" name="TextBox 48"/>
+          <p:cNvSpPr txBox="1"/>
+          <p:nvPr/>
+        </p:nvSpPr>
+        <p:spPr>
+          <a:xfrm>
+            <a:off x="777240" y="6053327"/>
+            <a:ext cx="10637215" cy="292608"/>
+          </a:xfrm>
+          <a:prstGeom prst="rect">
+            <a:avLst/>
+          </a:prstGeom>
+          <a:noFill/>
+        </p:spPr>
+        <p:txBody>
+          <a:bodyPr wrap="square" anchor="t" lIns="0" rIns="0" tIns="0" bIns="0">
+            <a:spAutoFit/>
+          </a:bodyPr>
+          <a:lstStyle/>
+          <a:p>
+            <a:pPr algn="l">
+              <a:lnSpc>
+                <a:spcPct val="125000"/>
+              </a:lnSpc>
+            </a:pPr>
+            <a:r>
+              <a:rPr sz="1250" b="0">
+                <a:solidFill>
+                  <a:srgbClr val="44505E"/>
+                </a:solidFill>
+                <a:latin typeface="Malgun Gothic"/>
+                <a:ea typeface="Malgun Gothic"/>
+                <a:cs typeface="Malgun Gothic"/>
+              </a:rPr>
+              <a:t>세 역할이 같은 숫자를 쓴다 — 제안서·투자설명서·발표자료가 모두 재현 브랜치 v2-tier2a-freeze 의 한 벌(metrics.json)에서 나온다.</a:t>
             </a:r>
           </a:p>
         </p:txBody>
@@ -13392,6 +15696,315 @@
                 <a:cs typeface="Malgun Gothic"/>
               </a:rPr>
               <a:t>거래비용 왕복 0.10% 반영 · 세전 · 룩어헤드 방지 검증 완료 · 재현 브랜치 v2-tier2a-freeze</a:t>
+            </a:r>
+          </a:p>
+        </p:txBody>
+      </p:sp>
+    </p:spTree>
+  </p:cSld>
+  <p:clrMapOvr>
+    <a:masterClrMapping/>
+  </p:clrMapOvr>
+</p:sld>
+</file>
+
+<file path=ppt/slides/slide20.xml><?xml version="1.0" encoding="utf-8"?>
+<p:sld xmlns:a="http://schemas.openxmlformats.org/drawingml/2006/main" xmlns:p="http://schemas.openxmlformats.org/presentationml/2006/main" xmlns:r="http://schemas.openxmlformats.org/officeDocument/2006/relationships">
+  <p:cSld>
+    <p:spTree>
+      <p:nvGrpSpPr>
+        <p:cNvPr id="1" name=""/>
+        <p:cNvGrpSpPr/>
+        <p:nvPr/>
+      </p:nvGrpSpPr>
+      <p:grpSpPr/>
+      <p:sp>
+        <p:nvSpPr>
+          <p:cNvPr id="2" name="Rectangle 1"/>
+          <p:cNvSpPr/>
+          <p:nvPr/>
+        </p:nvSpPr>
+        <p:spPr>
+          <a:xfrm>
+            <a:off x="0" y="0"/>
+            <a:ext cx="12191695" cy="6858000"/>
+          </a:xfrm>
+          <a:prstGeom prst="rect">
+            <a:avLst/>
+          </a:prstGeom>
+          <a:solidFill>
+            <a:srgbClr val="1F3A5F"/>
+          </a:solidFill>
+          <a:ln>
+            <a:noFill/>
+          </a:ln>
+          <a:effectLst/>
+        </p:spPr>
+        <p:style>
+          <a:lnRef idx="1">
+            <a:schemeClr val="accent1"/>
+          </a:lnRef>
+          <a:fillRef idx="3">
+            <a:schemeClr val="accent1"/>
+          </a:fillRef>
+          <a:effectRef idx="2">
+            <a:schemeClr val="accent1"/>
+          </a:effectRef>
+          <a:fontRef idx="minor">
+            <a:schemeClr val="lt1"/>
+          </a:fontRef>
+        </p:style>
+        <p:txBody>
+          <a:bodyPr rtlCol="0" anchor="ctr"/>
+          <a:lstStyle/>
+          <a:p/>
+        </p:txBody>
+      </p:sp>
+      <p:sp>
+        <p:nvSpPr>
+          <p:cNvPr id="3" name="Rectangle 2"/>
+          <p:cNvSpPr/>
+          <p:nvPr/>
+        </p:nvSpPr>
+        <p:spPr>
+          <a:xfrm>
+            <a:off x="0" y="6739128"/>
+            <a:ext cx="12191695" cy="118872"/>
+          </a:xfrm>
+          <a:prstGeom prst="rect">
+            <a:avLst/>
+          </a:prstGeom>
+          <a:solidFill>
+            <a:srgbClr val="C8A24B"/>
+          </a:solidFill>
+          <a:ln>
+            <a:noFill/>
+          </a:ln>
+          <a:effectLst/>
+        </p:spPr>
+        <p:style>
+          <a:lnRef idx="1">
+            <a:schemeClr val="accent1"/>
+          </a:lnRef>
+          <a:fillRef idx="3">
+            <a:schemeClr val="accent1"/>
+          </a:fillRef>
+          <a:effectRef idx="2">
+            <a:schemeClr val="accent1"/>
+          </a:effectRef>
+          <a:fontRef idx="minor">
+            <a:schemeClr val="lt1"/>
+          </a:fontRef>
+        </p:style>
+        <p:txBody>
+          <a:bodyPr rtlCol="0" anchor="ctr"/>
+          <a:lstStyle/>
+          <a:p/>
+        </p:txBody>
+      </p:sp>
+      <p:sp>
+        <p:nvSpPr>
+          <p:cNvPr id="4" name="TextBox 3"/>
+          <p:cNvSpPr txBox="1"/>
+          <p:nvPr/>
+        </p:nvSpPr>
+        <p:spPr>
+          <a:xfrm>
+            <a:off x="777240" y="2148840"/>
+            <a:ext cx="10637215" cy="822960"/>
+          </a:xfrm>
+          <a:prstGeom prst="rect">
+            <a:avLst/>
+          </a:prstGeom>
+          <a:noFill/>
+        </p:spPr>
+        <p:txBody>
+          <a:bodyPr wrap="square" anchor="t" lIns="0" rIns="0" tIns="0" bIns="0">
+            <a:spAutoFit/>
+          </a:bodyPr>
+          <a:lstStyle/>
+          <a:p>
+            <a:pPr algn="l">
+              <a:lnSpc>
+                <a:spcPct val="125000"/>
+              </a:lnSpc>
+            </a:pPr>
+            <a:r>
+              <a:rPr sz="4200" b="1">
+                <a:solidFill>
+                  <a:srgbClr val="FFFFFF"/>
+                </a:solidFill>
+                <a:latin typeface="Malgun Gothic"/>
+                <a:ea typeface="Malgun Gothic"/>
+                <a:cs typeface="Malgun Gothic"/>
+              </a:rPr>
+              <a:t>확신의 크기만큼만 싣는다</a:t>
+            </a:r>
+          </a:p>
+        </p:txBody>
+      </p:sp>
+      <p:sp>
+        <p:nvSpPr>
+          <p:cNvPr id="5" name="Rectangle 4"/>
+          <p:cNvSpPr/>
+          <p:nvPr/>
+        </p:nvSpPr>
+        <p:spPr>
+          <a:xfrm>
+            <a:off x="777240" y="3200400"/>
+            <a:ext cx="2377440" cy="9525"/>
+          </a:xfrm>
+          <a:prstGeom prst="rect">
+            <a:avLst/>
+          </a:prstGeom>
+          <a:solidFill>
+            <a:srgbClr val="C8A24B"/>
+          </a:solidFill>
+          <a:ln>
+            <a:noFill/>
+          </a:ln>
+          <a:effectLst/>
+        </p:spPr>
+        <p:style>
+          <a:lnRef idx="1">
+            <a:schemeClr val="accent1"/>
+          </a:lnRef>
+          <a:fillRef idx="3">
+            <a:schemeClr val="accent1"/>
+          </a:fillRef>
+          <a:effectRef idx="2">
+            <a:schemeClr val="accent1"/>
+          </a:effectRef>
+          <a:fontRef idx="minor">
+            <a:schemeClr val="lt1"/>
+          </a:fontRef>
+        </p:style>
+        <p:txBody>
+          <a:bodyPr rtlCol="0" anchor="ctr"/>
+          <a:lstStyle/>
+          <a:p/>
+        </p:txBody>
+      </p:sp>
+      <p:sp>
+        <p:nvSpPr>
+          <p:cNvPr id="6" name="TextBox 5"/>
+          <p:cNvSpPr txBox="1"/>
+          <p:nvPr/>
+        </p:nvSpPr>
+        <p:spPr>
+          <a:xfrm>
+            <a:off x="777240" y="3520440"/>
+            <a:ext cx="9265615" cy="1280160"/>
+          </a:xfrm>
+          <a:prstGeom prst="rect">
+            <a:avLst/>
+          </a:prstGeom>
+          <a:noFill/>
+        </p:spPr>
+        <p:txBody>
+          <a:bodyPr wrap="square" anchor="t" lIns="0" rIns="0" tIns="0" bIns="0">
+            <a:spAutoFit/>
+          </a:bodyPr>
+          <a:lstStyle/>
+          <a:p>
+            <a:pPr algn="l">
+              <a:lnSpc>
+                <a:spcPct val="145000"/>
+              </a:lnSpc>
+            </a:pPr>
+            <a:r>
+              <a:rPr sz="1700" b="0">
+                <a:solidFill>
+                  <a:srgbClr val="D3DCE8"/>
+                </a:solidFill>
+                <a:latin typeface="Malgun Gothic"/>
+                <a:ea typeface="Malgun Gothic"/>
+                <a:cs typeface="Malgun Gothic"/>
+              </a:rPr>
+              <a:t>시장을 이기는 상품이 아니라, 시장에 남아 있게 하는 상품입니다.
+55세까지 묶이는 계좌에 필요한 것은 가장 높은 수익률이 아니라 견딜 수 있는 낙폭입니다.</a:t>
+            </a:r>
+          </a:p>
+        </p:txBody>
+      </p:sp>
+      <p:sp>
+        <p:nvSpPr>
+          <p:cNvPr id="7" name="TextBox 6"/>
+          <p:cNvSpPr txBox="1"/>
+          <p:nvPr/>
+        </p:nvSpPr>
+        <p:spPr>
+          <a:xfrm>
+            <a:off x="777240" y="5120640"/>
+            <a:ext cx="10637215" cy="365760"/>
+          </a:xfrm>
+          <a:prstGeom prst="rect">
+            <a:avLst/>
+          </a:prstGeom>
+          <a:noFill/>
+        </p:spPr>
+        <p:txBody>
+          <a:bodyPr wrap="square" anchor="t" lIns="0" rIns="0" tIns="0" bIns="0">
+            <a:spAutoFit/>
+          </a:bodyPr>
+          <a:lstStyle/>
+          <a:p>
+            <a:pPr algn="l">
+              <a:lnSpc>
+                <a:spcPct val="125000"/>
+              </a:lnSpc>
+            </a:pPr>
+            <a:r>
+              <a:rPr sz="1600" b="1">
+                <a:solidFill>
+                  <a:srgbClr val="C8A24B"/>
+                </a:solidFill>
+                <a:latin typeface="Malgun Gothic"/>
+                <a:ea typeface="Malgun Gothic"/>
+                <a:cs typeface="Malgun Gothic"/>
+              </a:rPr>
+              <a:t>CAGR 13.6%   ·   MDD −12.7%   ·   Calmar 1.07   ·   최악의 해 +2.2%</a:t>
+            </a:r>
+          </a:p>
+        </p:txBody>
+      </p:sp>
+      <p:sp>
+        <p:nvSpPr>
+          <p:cNvPr id="8" name="TextBox 7"/>
+          <p:cNvSpPr txBox="1"/>
+          <p:nvPr/>
+        </p:nvSpPr>
+        <p:spPr>
+          <a:xfrm>
+            <a:off x="777240" y="5943600"/>
+            <a:ext cx="10637215" cy="274320"/>
+          </a:xfrm>
+          <a:prstGeom prst="rect">
+            <a:avLst/>
+          </a:prstGeom>
+          <a:noFill/>
+        </p:spPr>
+        <p:txBody>
+          <a:bodyPr wrap="square" anchor="t" lIns="0" rIns="0" tIns="0" bIns="0">
+            <a:spAutoFit/>
+          </a:bodyPr>
+          <a:lstStyle/>
+          <a:p>
+            <a:pPr algn="l">
+              <a:lnSpc>
+                <a:spcPct val="125000"/>
+              </a:lnSpc>
+            </a:pPr>
+            <a:r>
+              <a:rPr sz="1200" b="0">
+                <a:solidFill>
+                  <a:srgbClr val="8C9DB5"/>
+                </a:solidFill>
+                <a:latin typeface="Malgun Gothic"/>
+                <a:ea typeface="Malgun Gothic"/>
+                <a:cs typeface="Malgun Gothic"/>
+              </a:rPr>
+              <a:t>헬름 IRP세븐서티액티브  ·  AI퀀트 2기 2조  ·  재현 브랜치 v2-tier2a-freeze</a:t>
             </a:r>
           </a:p>
         </p:txBody>

--- a/doc/헬름_IRP세븐서티액티브_발표자료.pptx
+++ b/doc/헬름_IRP세븐서티액티브_발표자료.pptx
@@ -12022,7 +12022,7 @@
                           <a:ea typeface="Malgun Gothic"/>
                           <a:cs typeface="Malgun Gothic"/>
                         </a:rPr>
-                        <a:t>월간 점수 체크 · 분기 정기 + 목표 대비 ±7%p 이탈 시 수시</a:t>
+                        <a:t>3층 — ① 월간 종목 로테이션 · ② 분기 정기 비중 복원 · ③ ±7%p 이탈 시 당일 수시</a:t>
                       </a:r>
                     </a:p>
                   </a:txBody>
@@ -21080,7 +21080,7 @@
                 <a:ea typeface="Malgun Gothic"/>
                 <a:cs typeface="Malgun Gothic"/>
               </a:rPr>
-              <a:t>리밸런싱</a:t>
+              <a:t>리밸런싱 — 3층</a:t>
             </a:r>
           </a:p>
         </p:txBody>
@@ -21121,8 +21121,10 @@
                 <a:ea typeface="Malgun Gothic"/>
                 <a:cs typeface="Malgun Gothic"/>
               </a:rPr>
-              <a:t>분기 정기 + 목표 대비 ±7%p 이탈 시 수시.
-월 적립 현금흐름이 자연 리밸런싱을 보조.</a:t>
+              <a:t>① 월간: 슬리브 안 종목 교체(위 STEP 1·2)
+② 분기: 채권 30 / 위험자산 70 비중 복원
+③ 수시: ±7%p 이탈 시 매일 감시·당일 집행
+(안전망 — 백테스트 무발동)</a:t>
             </a:r>
           </a:p>
         </p:txBody>
